--- a/体检平台架构决策与核心流程.pptx
+++ b/体检平台架构决策与核心流程.pptx
@@ -30,6 +30,7 @@
     <p:sldId id="278" r:id="rId29"/>
     <p:sldId id="279" r:id="rId30"/>
     <p:sldId id="280" r:id="rId31"/>
+    <p:sldId id="281" r:id="rId32"/>
   </p:sldIdLst>
   <p:sldSz cx="12191695" cy="6858000" type="screen4x3"/>
   <p:notesSz cx="6858000" cy="9144000"/>
@@ -43733,6 +43734,3385 @@
                 <a:ea typeface="Microsoft YaHei"/>
               </a:rPr>
               <a:t>25</a:t>
+            </a:r>
+          </a:p>
+        </p:txBody>
+      </p:sp>
+    </p:spTree>
+  </p:cSld>
+  <p:clrMapOvr>
+    <a:masterClrMapping/>
+  </p:clrMapOvr>
+</p:sld>
+</file>
+
+<file path=ppt/slides/slide26.xml><?xml version="1.0" encoding="utf-8"?>
+<p:sld xmlns:a="http://schemas.openxmlformats.org/drawingml/2006/main" xmlns:p="http://schemas.openxmlformats.org/presentationml/2006/main" xmlns:r="http://schemas.openxmlformats.org/officeDocument/2006/relationships">
+  <p:cSld>
+    <p:spTree>
+      <p:nvGrpSpPr>
+        <p:cNvPr id="1" name=""/>
+        <p:cNvGrpSpPr/>
+        <p:nvPr/>
+      </p:nvGrpSpPr>
+      <p:grpSpPr/>
+      <p:sp>
+        <p:nvSpPr>
+          <p:cNvPr id="2" name="Rounded Rectangle 1"/>
+          <p:cNvSpPr/>
+          <p:nvPr/>
+        </p:nvSpPr>
+        <p:spPr>
+          <a:xfrm>
+            <a:off x="502920" y="329184"/>
+            <a:ext cx="621792" cy="621792"/>
+          </a:xfrm>
+          <a:prstGeom prst="roundRect">
+            <a:avLst>
+              <a:gd name="adj" fmla="val 22000"/>
+            </a:avLst>
+          </a:prstGeom>
+          <a:solidFill>
+            <a:srgbClr val="2E8B57"/>
+          </a:solidFill>
+          <a:ln>
+            <a:noFill/>
+          </a:ln>
+          <a:effectLst/>
+        </p:spPr>
+        <p:style>
+          <a:lnRef idx="1">
+            <a:schemeClr val="accent1"/>
+          </a:lnRef>
+          <a:fillRef idx="3">
+            <a:schemeClr val="accent1"/>
+          </a:fillRef>
+          <a:effectRef idx="2">
+            <a:schemeClr val="accent1"/>
+          </a:effectRef>
+          <a:fontRef idx="minor">
+            <a:schemeClr val="lt1"/>
+          </a:fontRef>
+        </p:style>
+        <p:txBody>
+          <a:bodyPr rtlCol="0" anchor="ctr" wrap="square" lIns="45720" rIns="45720" tIns="18288" bIns="18288"/>
+          <a:lstStyle/>
+          <a:p>
+            <a:pPr algn="ctr">
+              <a:lnSpc>
+                <a:spcPct val="98000"/>
+              </a:lnSpc>
+            </a:pPr>
+            <a:r>
+              <a:rPr sz="1100" b="1" i="0">
+                <a:solidFill>
+                  <a:srgbClr val="FFFFFF"/>
+                </a:solidFill>
+                <a:latin typeface="Microsoft YaHei"/>
+                <a:ea typeface="Microsoft YaHei"/>
+              </a:rPr>
+              <a:t>TEST</a:t>
+            </a:r>
+          </a:p>
+        </p:txBody>
+      </p:sp>
+      <p:sp>
+        <p:nvSpPr>
+          <p:cNvPr id="3" name="TextBox 2"/>
+          <p:cNvSpPr txBox="1"/>
+          <p:nvPr/>
+        </p:nvSpPr>
+        <p:spPr>
+          <a:xfrm>
+            <a:off x="1298448" y="256032"/>
+            <a:ext cx="7863840" cy="502920"/>
+          </a:xfrm>
+          <a:prstGeom prst="rect">
+            <a:avLst/>
+          </a:prstGeom>
+          <a:noFill/>
+        </p:spPr>
+        <p:txBody>
+          <a:bodyPr wrap="square" anchor="ctr" lIns="45720" rIns="45720" tIns="18288" bIns="18288">
+            <a:spAutoFit/>
+          </a:bodyPr>
+          <a:lstStyle/>
+          <a:p>
+            <a:pPr algn="l">
+              <a:lnSpc>
+                <a:spcPct val="98000"/>
+              </a:lnSpc>
+            </a:pPr>
+            <a:r>
+              <a:rPr sz="2300" b="1" i="0">
+                <a:solidFill>
+                  <a:srgbClr val="24324E"/>
+                </a:solidFill>
+                <a:latin typeface="Microsoft YaHei"/>
+                <a:ea typeface="Microsoft YaHei"/>
+              </a:rPr>
+              <a:t>架构决策可测试化 · 域边界测试与回归</a:t>
+            </a:r>
+          </a:p>
+        </p:txBody>
+      </p:sp>
+      <p:sp>
+        <p:nvSpPr>
+          <p:cNvPr id="4" name="TextBox 3"/>
+          <p:cNvSpPr txBox="1"/>
+          <p:nvPr/>
+        </p:nvSpPr>
+        <p:spPr>
+          <a:xfrm>
+            <a:off x="1316736" y="786384"/>
+            <a:ext cx="7863840" cy="274320"/>
+          </a:xfrm>
+          <a:prstGeom prst="rect">
+            <a:avLst/>
+          </a:prstGeom>
+          <a:noFill/>
+        </p:spPr>
+        <p:txBody>
+          <a:bodyPr wrap="square" anchor="ctr" lIns="45720" rIns="45720" tIns="18288" bIns="18288">
+            <a:spAutoFit/>
+          </a:bodyPr>
+          <a:lstStyle/>
+          <a:p>
+            <a:pPr algn="l">
+              <a:lnSpc>
+                <a:spcPct val="98000"/>
+              </a:lnSpc>
+            </a:pPr>
+            <a:r>
+              <a:rPr sz="1050" b="0" i="0">
+                <a:solidFill>
+                  <a:srgbClr val="6B778C"/>
+                </a:solidFill>
+                <a:latin typeface="Microsoft YaHei"/>
+                <a:ea typeface="Microsoft YaHei"/>
+              </a:rPr>
+              <a:t>Executable ADRs · Domain Boundary &amp; Regression Tests</a:t>
+            </a:r>
+          </a:p>
+        </p:txBody>
+      </p:sp>
+      <p:sp>
+        <p:nvSpPr>
+          <p:cNvPr id="5" name="Rounded Rectangle 4"/>
+          <p:cNvSpPr/>
+          <p:nvPr/>
+        </p:nvSpPr>
+        <p:spPr>
+          <a:xfrm>
+            <a:off x="9434322" y="475488"/>
+            <a:ext cx="605790" cy="347472"/>
+          </a:xfrm>
+          <a:prstGeom prst="roundRect">
+            <a:avLst>
+              <a:gd name="adj" fmla="val 50000"/>
+            </a:avLst>
+          </a:prstGeom>
+          <a:solidFill>
+            <a:srgbClr val="FFFFFF"/>
+          </a:solidFill>
+          <a:ln w="12700">
+            <a:solidFill>
+              <a:srgbClr val="2E8B57"/>
+            </a:solidFill>
+          </a:ln>
+          <a:effectLst/>
+        </p:spPr>
+        <p:style>
+          <a:lnRef idx="1">
+            <a:schemeClr val="accent1"/>
+          </a:lnRef>
+          <a:fillRef idx="3">
+            <a:schemeClr val="accent1"/>
+          </a:fillRef>
+          <a:effectRef idx="2">
+            <a:schemeClr val="accent1"/>
+          </a:effectRef>
+          <a:fontRef idx="minor">
+            <a:schemeClr val="lt1"/>
+          </a:fontRef>
+        </p:style>
+        <p:txBody>
+          <a:bodyPr rtlCol="0" anchor="ctr" wrap="square" lIns="45720" rIns="45720" tIns="18288" bIns="18288"/>
+          <a:lstStyle/>
+          <a:p>
+            <a:pPr algn="ctr">
+              <a:lnSpc>
+                <a:spcPct val="98000"/>
+              </a:lnSpc>
+            </a:pPr>
+            <a:r>
+              <a:rPr sz="900" b="1" i="0">
+                <a:solidFill>
+                  <a:srgbClr val="2E8B57"/>
+                </a:solidFill>
+                <a:latin typeface="Microsoft YaHei"/>
+                <a:ea typeface="Microsoft YaHei"/>
+              </a:rPr>
+              <a:t>域边界</a:t>
+            </a:r>
+          </a:p>
+        </p:txBody>
+      </p:sp>
+      <p:sp>
+        <p:nvSpPr>
+          <p:cNvPr id="6" name="Rounded Rectangle 5"/>
+          <p:cNvSpPr/>
+          <p:nvPr/>
+        </p:nvSpPr>
+        <p:spPr>
+          <a:xfrm>
+            <a:off x="10168128" y="475488"/>
+            <a:ext cx="722376" cy="347472"/>
+          </a:xfrm>
+          <a:prstGeom prst="roundRect">
+            <a:avLst>
+              <a:gd name="adj" fmla="val 50000"/>
+            </a:avLst>
+          </a:prstGeom>
+          <a:solidFill>
+            <a:srgbClr val="FFFFFF"/>
+          </a:solidFill>
+          <a:ln w="12700">
+            <a:solidFill>
+              <a:srgbClr val="2E8B57"/>
+            </a:solidFill>
+          </a:ln>
+          <a:effectLst/>
+        </p:spPr>
+        <p:style>
+          <a:lnRef idx="1">
+            <a:schemeClr val="accent1"/>
+          </a:lnRef>
+          <a:fillRef idx="3">
+            <a:schemeClr val="accent1"/>
+          </a:fillRef>
+          <a:effectRef idx="2">
+            <a:schemeClr val="accent1"/>
+          </a:effectRef>
+          <a:fontRef idx="minor">
+            <a:schemeClr val="lt1"/>
+          </a:fontRef>
+        </p:style>
+        <p:txBody>
+          <a:bodyPr rtlCol="0" anchor="ctr" wrap="square" lIns="45720" rIns="45720" tIns="18288" bIns="18288"/>
+          <a:lstStyle/>
+          <a:p>
+            <a:pPr algn="ctr">
+              <a:lnSpc>
+                <a:spcPct val="98000"/>
+              </a:lnSpc>
+            </a:pPr>
+            <a:r>
+              <a:rPr sz="900" b="1" i="0">
+                <a:solidFill>
+                  <a:srgbClr val="2E8B57"/>
+                </a:solidFill>
+                <a:latin typeface="Microsoft YaHei"/>
+                <a:ea typeface="Microsoft YaHei"/>
+              </a:rPr>
+              <a:t>回归护栏</a:t>
+            </a:r>
+          </a:p>
+        </p:txBody>
+      </p:sp>
+      <p:sp>
+        <p:nvSpPr>
+          <p:cNvPr id="7" name="Rounded Rectangle 6"/>
+          <p:cNvSpPr/>
+          <p:nvPr/>
+        </p:nvSpPr>
+        <p:spPr>
+          <a:xfrm>
+            <a:off x="11018519" y="475488"/>
+            <a:ext cx="667512" cy="347472"/>
+          </a:xfrm>
+          <a:prstGeom prst="roundRect">
+            <a:avLst>
+              <a:gd name="adj" fmla="val 50000"/>
+            </a:avLst>
+          </a:prstGeom>
+          <a:solidFill>
+            <a:srgbClr val="FFFFFF"/>
+          </a:solidFill>
+          <a:ln w="12700">
+            <a:solidFill>
+              <a:srgbClr val="2E8B57"/>
+            </a:solidFill>
+          </a:ln>
+          <a:effectLst/>
+        </p:spPr>
+        <p:style>
+          <a:lnRef idx="1">
+            <a:schemeClr val="accent1"/>
+          </a:lnRef>
+          <a:fillRef idx="3">
+            <a:schemeClr val="accent1"/>
+          </a:fillRef>
+          <a:effectRef idx="2">
+            <a:schemeClr val="accent1"/>
+          </a:effectRef>
+          <a:fontRef idx="minor">
+            <a:schemeClr val="lt1"/>
+          </a:fontRef>
+        </p:style>
+        <p:txBody>
+          <a:bodyPr rtlCol="0" anchor="ctr" wrap="square" lIns="45720" rIns="45720" tIns="18288" bIns="18288"/>
+          <a:lstStyle/>
+          <a:p>
+            <a:pPr algn="ctr">
+              <a:lnSpc>
+                <a:spcPct val="98000"/>
+              </a:lnSpc>
+            </a:pPr>
+            <a:r>
+              <a:rPr sz="900" b="1" i="0">
+                <a:solidFill>
+                  <a:srgbClr val="2E8B57"/>
+                </a:solidFill>
+                <a:latin typeface="Microsoft YaHei"/>
+                <a:ea typeface="Microsoft YaHei"/>
+              </a:rPr>
+              <a:t>24 用例</a:t>
+            </a:r>
+          </a:p>
+        </p:txBody>
+      </p:sp>
+      <p:cxnSp>
+        <p:nvCxnSpPr>
+          <p:cNvPr id="8" name="Connector 7"/>
+          <p:cNvCxnSpPr/>
+          <p:nvPr/>
+        </p:nvCxnSpPr>
+        <p:spPr>
+          <a:xfrm>
+            <a:off x="502920" y="1207008"/>
+            <a:ext cx="11183112" cy="0"/>
+          </a:xfrm>
+          <a:prstGeom prst="line">
+            <a:avLst/>
+          </a:prstGeom>
+          <a:ln w="12700">
+            <a:solidFill>
+              <a:srgbClr val="D8E0EC"/>
+            </a:solidFill>
+          </a:ln>
+          <a:effectLst/>
+        </p:spPr>
+        <p:style>
+          <a:lnRef idx="2">
+            <a:schemeClr val="accent1"/>
+          </a:lnRef>
+          <a:fillRef idx="0">
+            <a:schemeClr val="accent1"/>
+          </a:fillRef>
+          <a:effectRef idx="1">
+            <a:schemeClr val="accent1"/>
+          </a:effectRef>
+          <a:fontRef idx="minor">
+            <a:schemeClr val="tx1"/>
+          </a:fontRef>
+        </p:style>
+      </p:cxnSp>
+      <p:sp>
+        <p:nvSpPr>
+          <p:cNvPr id="9" name="Rectangle 8"/>
+          <p:cNvSpPr/>
+          <p:nvPr/>
+        </p:nvSpPr>
+        <p:spPr>
+          <a:xfrm>
+            <a:off x="502920" y="1353312"/>
+            <a:ext cx="11183112" cy="548640"/>
+          </a:xfrm>
+          <a:prstGeom prst="rect">
+            <a:avLst/>
+          </a:prstGeom>
+          <a:solidFill>
+            <a:srgbClr val="F4F7FB"/>
+          </a:solidFill>
+          <a:ln>
+            <a:noFill/>
+          </a:ln>
+          <a:effectLst/>
+        </p:spPr>
+        <p:style>
+          <a:lnRef idx="1">
+            <a:schemeClr val="accent1"/>
+          </a:lnRef>
+          <a:fillRef idx="3">
+            <a:schemeClr val="accent1"/>
+          </a:fillRef>
+          <a:effectRef idx="2">
+            <a:schemeClr val="accent1"/>
+          </a:effectRef>
+          <a:fontRef idx="minor">
+            <a:schemeClr val="lt1"/>
+          </a:fontRef>
+        </p:style>
+        <p:txBody>
+          <a:bodyPr rtlCol="0" anchor="ctr" wrap="square" lIns="45720" rIns="45720" tIns="18288" bIns="18288"/>
+          <a:lstStyle/>
+          <a:p>
+            <a:pPr algn="l">
+              <a:lnSpc>
+                <a:spcPct val="98000"/>
+              </a:lnSpc>
+            </a:pPr>
+            <a:r>
+              <a:rPr sz="1200" b="1" i="0">
+                <a:solidFill>
+                  <a:srgbClr val="24324E"/>
+                </a:solidFill>
+                <a:latin typeface="Microsoft YaHei"/>
+                <a:ea typeface="Microsoft YaHei"/>
+              </a:rPr>
+              <a:t>架构决策不止于文档：各项 ADR 的业务规则固化为可执行测试用例（node --test），以域为边界持续验证 —— 正例允许、反例强制拦截，变更一键回归，减少人工评审与巡检。</a:t>
+            </a:r>
+          </a:p>
+        </p:txBody>
+      </p:sp>
+      <p:sp>
+        <p:nvSpPr>
+          <p:cNvPr id="10" name="Rectangle 9"/>
+          <p:cNvSpPr/>
+          <p:nvPr/>
+        </p:nvSpPr>
+        <p:spPr>
+          <a:xfrm>
+            <a:off x="502920" y="1353312"/>
+            <a:ext cx="82296" cy="548640"/>
+          </a:xfrm>
+          <a:prstGeom prst="rect">
+            <a:avLst/>
+          </a:prstGeom>
+          <a:solidFill>
+            <a:srgbClr val="2E8B57"/>
+          </a:solidFill>
+          <a:ln>
+            <a:noFill/>
+          </a:ln>
+          <a:effectLst/>
+        </p:spPr>
+        <p:style>
+          <a:lnRef idx="1">
+            <a:schemeClr val="accent1"/>
+          </a:lnRef>
+          <a:fillRef idx="3">
+            <a:schemeClr val="accent1"/>
+          </a:fillRef>
+          <a:effectRef idx="2">
+            <a:schemeClr val="accent1"/>
+          </a:effectRef>
+          <a:fontRef idx="minor">
+            <a:schemeClr val="lt1"/>
+          </a:fontRef>
+        </p:style>
+        <p:txBody>
+          <a:bodyPr rtlCol="0" anchor="ctr" wrap="square" lIns="45720" rIns="45720" tIns="18288" bIns="18288"/>
+          <a:lstStyle/>
+          <a:p>
+            <a:pPr algn="ctr">
+              <a:lnSpc>
+                <a:spcPct val="98000"/>
+              </a:lnSpc>
+            </a:pPr>
+            <a:r>
+              <a:rPr sz="1000" b="0" i="0">
+                <a:solidFill>
+                  <a:srgbClr val="24324E"/>
+                </a:solidFill>
+                <a:latin typeface="Microsoft YaHei"/>
+                <a:ea typeface="Microsoft YaHei"/>
+              </a:rPr>
+              <a:t/>
+            </a:r>
+          </a:p>
+        </p:txBody>
+      </p:sp>
+      <p:sp>
+        <p:nvSpPr>
+          <p:cNvPr id="11" name="Rounded Rectangle 10"/>
+          <p:cNvSpPr/>
+          <p:nvPr/>
+        </p:nvSpPr>
+        <p:spPr>
+          <a:xfrm>
+            <a:off x="548640" y="2029968"/>
+            <a:ext cx="2084831" cy="713232"/>
+          </a:xfrm>
+          <a:prstGeom prst="roundRect">
+            <a:avLst>
+              <a:gd name="adj" fmla="val 16000"/>
+            </a:avLst>
+          </a:prstGeom>
+          <a:solidFill>
+            <a:srgbClr val="E8F0FA"/>
+          </a:solidFill>
+          <a:ln w="12700">
+            <a:solidFill>
+              <a:srgbClr val="2F6DB3"/>
+            </a:solidFill>
+          </a:ln>
+          <a:effectLst/>
+        </p:spPr>
+        <p:style>
+          <a:lnRef idx="1">
+            <a:schemeClr val="accent1"/>
+          </a:lnRef>
+          <a:fillRef idx="3">
+            <a:schemeClr val="accent1"/>
+          </a:fillRef>
+          <a:effectRef idx="2">
+            <a:schemeClr val="accent1"/>
+          </a:effectRef>
+          <a:fontRef idx="minor">
+            <a:schemeClr val="lt1"/>
+          </a:fontRef>
+        </p:style>
+        <p:txBody>
+          <a:bodyPr rtlCol="0" anchor="ctr" wrap="square" lIns="45720" rIns="45720" tIns="18288" bIns="18288"/>
+          <a:lstStyle/>
+          <a:p>
+            <a:pPr algn="ctr">
+              <a:lnSpc>
+                <a:spcPct val="98000"/>
+              </a:lnSpc>
+            </a:pPr>
+            <a:r>
+              <a:rPr sz="950" b="0" i="0">
+                <a:solidFill>
+                  <a:srgbClr val="24324E"/>
+                </a:solidFill>
+                <a:latin typeface="Microsoft YaHei"/>
+                <a:ea typeface="Microsoft YaHei"/>
+              </a:rPr>
+              <a:t>ADR-0001~0011</a:t>
+            </a:r>
+          </a:p>
+          <a:p>
+            <a:pPr algn="ctr">
+              <a:lnSpc>
+                <a:spcPct val="98000"/>
+              </a:lnSpc>
+            </a:pPr>
+            <a:r>
+              <a:rPr sz="950" b="0" i="0">
+                <a:solidFill>
+                  <a:srgbClr val="24324E"/>
+                </a:solidFill>
+                <a:latin typeface="Microsoft YaHei"/>
+                <a:ea typeface="Microsoft YaHei"/>
+              </a:rPr>
+              <a:t>架构决策文档</a:t>
+            </a:r>
+          </a:p>
+        </p:txBody>
+      </p:sp>
+      <p:cxnSp>
+        <p:nvCxnSpPr>
+          <p:cNvPr id="12" name="Connector 11"/>
+          <p:cNvCxnSpPr/>
+          <p:nvPr/>
+        </p:nvCxnSpPr>
+        <p:spPr>
+          <a:xfrm>
+            <a:off x="2642615" y="2386584"/>
+            <a:ext cx="182881" cy="0"/>
+          </a:xfrm>
+          <a:prstGeom prst="line">
+            <a:avLst/>
+          </a:prstGeom>
+          <a:ln w="20320">
+            <a:solidFill>
+              <a:srgbClr val="516585"/>
+            </a:solidFill>
+            <a:tailEnd type="triangle" w="med" len="med"/>
+          </a:ln>
+          <a:effectLst/>
+        </p:spPr>
+        <p:style>
+          <a:lnRef idx="2">
+            <a:schemeClr val="accent1"/>
+          </a:lnRef>
+          <a:fillRef idx="0">
+            <a:schemeClr val="accent1"/>
+          </a:fillRef>
+          <a:effectRef idx="1">
+            <a:schemeClr val="accent1"/>
+          </a:effectRef>
+          <a:fontRef idx="minor">
+            <a:schemeClr val="tx1"/>
+          </a:fontRef>
+        </p:style>
+      </p:cxnSp>
+      <p:sp>
+        <p:nvSpPr>
+          <p:cNvPr id="13" name="Rounded Rectangle 12"/>
+          <p:cNvSpPr/>
+          <p:nvPr/>
+        </p:nvSpPr>
+        <p:spPr>
+          <a:xfrm>
+            <a:off x="2834640" y="2029968"/>
+            <a:ext cx="2084831" cy="713232"/>
+          </a:xfrm>
+          <a:prstGeom prst="roundRect">
+            <a:avLst>
+              <a:gd name="adj" fmla="val 16000"/>
+            </a:avLst>
+          </a:prstGeom>
+          <a:solidFill>
+            <a:srgbClr val="FFFFFF"/>
+          </a:solidFill>
+          <a:ln w="12700">
+            <a:solidFill>
+              <a:srgbClr val="2F6DB3"/>
+            </a:solidFill>
+          </a:ln>
+          <a:effectLst/>
+        </p:spPr>
+        <p:style>
+          <a:lnRef idx="1">
+            <a:schemeClr val="accent1"/>
+          </a:lnRef>
+          <a:fillRef idx="3">
+            <a:schemeClr val="accent1"/>
+          </a:fillRef>
+          <a:effectRef idx="2">
+            <a:schemeClr val="accent1"/>
+          </a:effectRef>
+          <a:fontRef idx="minor">
+            <a:schemeClr val="lt1"/>
+          </a:fontRef>
+        </p:style>
+        <p:txBody>
+          <a:bodyPr rtlCol="0" anchor="ctr" wrap="square" lIns="45720" rIns="45720" tIns="18288" bIns="18288"/>
+          <a:lstStyle/>
+          <a:p>
+            <a:pPr algn="ctr">
+              <a:lnSpc>
+                <a:spcPct val="98000"/>
+              </a:lnSpc>
+            </a:pPr>
+            <a:r>
+              <a:rPr sz="950" b="0" i="0">
+                <a:solidFill>
+                  <a:srgbClr val="24324E"/>
+                </a:solidFill>
+                <a:latin typeface="Microsoft YaHei"/>
+                <a:ea typeface="Microsoft YaHei"/>
+              </a:rPr>
+              <a:t>抽取可执行规则</a:t>
+            </a:r>
+          </a:p>
+          <a:p>
+            <a:pPr algn="ctr">
+              <a:lnSpc>
+                <a:spcPct val="98000"/>
+              </a:lnSpc>
+            </a:pPr>
+            <a:r>
+              <a:rPr sz="950" b="0" i="0">
+                <a:solidFill>
+                  <a:srgbClr val="24324E"/>
+                </a:solidFill>
+                <a:latin typeface="Microsoft YaHei"/>
+                <a:ea typeface="Microsoft YaHei"/>
+              </a:rPr>
+              <a:t>正例 + 反例断言</a:t>
+            </a:r>
+          </a:p>
+        </p:txBody>
+      </p:sp>
+      <p:cxnSp>
+        <p:nvCxnSpPr>
+          <p:cNvPr id="14" name="Connector 13"/>
+          <p:cNvCxnSpPr/>
+          <p:nvPr/>
+        </p:nvCxnSpPr>
+        <p:spPr>
+          <a:xfrm>
+            <a:off x="4928616" y="2386584"/>
+            <a:ext cx="182880" cy="0"/>
+          </a:xfrm>
+          <a:prstGeom prst="line">
+            <a:avLst/>
+          </a:prstGeom>
+          <a:ln w="20320">
+            <a:solidFill>
+              <a:srgbClr val="516585"/>
+            </a:solidFill>
+            <a:tailEnd type="triangle" w="med" len="med"/>
+          </a:ln>
+          <a:effectLst/>
+        </p:spPr>
+        <p:style>
+          <a:lnRef idx="2">
+            <a:schemeClr val="accent1"/>
+          </a:lnRef>
+          <a:fillRef idx="0">
+            <a:schemeClr val="accent1"/>
+          </a:fillRef>
+          <a:effectRef idx="1">
+            <a:schemeClr val="accent1"/>
+          </a:effectRef>
+          <a:fontRef idx="minor">
+            <a:schemeClr val="tx1"/>
+          </a:fontRef>
+        </p:style>
+      </p:cxnSp>
+      <p:sp>
+        <p:nvSpPr>
+          <p:cNvPr id="15" name="Rounded Rectangle 14"/>
+          <p:cNvSpPr/>
+          <p:nvPr/>
+        </p:nvSpPr>
+        <p:spPr>
+          <a:xfrm>
+            <a:off x="5120640" y="2029968"/>
+            <a:ext cx="2084831" cy="713232"/>
+          </a:xfrm>
+          <a:prstGeom prst="roundRect">
+            <a:avLst>
+              <a:gd name="adj" fmla="val 16000"/>
+            </a:avLst>
+          </a:prstGeom>
+          <a:solidFill>
+            <a:srgbClr val="FFFFFF"/>
+          </a:solidFill>
+          <a:ln w="12700">
+            <a:solidFill>
+              <a:srgbClr val="2F6DB3"/>
+            </a:solidFill>
+          </a:ln>
+          <a:effectLst/>
+        </p:spPr>
+        <p:style>
+          <a:lnRef idx="1">
+            <a:schemeClr val="accent1"/>
+          </a:lnRef>
+          <a:fillRef idx="3">
+            <a:schemeClr val="accent1"/>
+          </a:fillRef>
+          <a:effectRef idx="2">
+            <a:schemeClr val="accent1"/>
+          </a:effectRef>
+          <a:fontRef idx="minor">
+            <a:schemeClr val="lt1"/>
+          </a:fontRef>
+        </p:style>
+        <p:txBody>
+          <a:bodyPr rtlCol="0" anchor="ctr" wrap="square" lIns="45720" rIns="45720" tIns="18288" bIns="18288"/>
+          <a:lstStyle/>
+          <a:p>
+            <a:pPr algn="ctr">
+              <a:lnSpc>
+                <a:spcPct val="98000"/>
+              </a:lnSpc>
+            </a:pPr>
+            <a:r>
+              <a:rPr sz="950" b="0" i="0">
+                <a:solidFill>
+                  <a:srgbClr val="24324E"/>
+                </a:solidFill>
+                <a:latin typeface="Microsoft YaHei"/>
+                <a:ea typeface="Microsoft YaHei"/>
+              </a:rPr>
+              <a:t>tests/adr_rules.test.mjs</a:t>
+            </a:r>
+          </a:p>
+          <a:p>
+            <a:pPr algn="ctr">
+              <a:lnSpc>
+                <a:spcPct val="98000"/>
+              </a:lnSpc>
+            </a:pPr>
+            <a:r>
+              <a:rPr sz="950" b="0" i="0">
+                <a:solidFill>
+                  <a:srgbClr val="24324E"/>
+                </a:solidFill>
+                <a:latin typeface="Microsoft YaHei"/>
+                <a:ea typeface="Microsoft YaHei"/>
+              </a:rPr>
+              <a:t>域边界测试用例</a:t>
+            </a:r>
+          </a:p>
+        </p:txBody>
+      </p:sp>
+      <p:cxnSp>
+        <p:nvCxnSpPr>
+          <p:cNvPr id="16" name="Connector 15"/>
+          <p:cNvCxnSpPr/>
+          <p:nvPr/>
+        </p:nvCxnSpPr>
+        <p:spPr>
+          <a:xfrm>
+            <a:off x="7214615" y="2386584"/>
+            <a:ext cx="182881" cy="0"/>
+          </a:xfrm>
+          <a:prstGeom prst="line">
+            <a:avLst/>
+          </a:prstGeom>
+          <a:ln w="20320">
+            <a:solidFill>
+              <a:srgbClr val="516585"/>
+            </a:solidFill>
+            <a:tailEnd type="triangle" w="med" len="med"/>
+          </a:ln>
+          <a:effectLst/>
+        </p:spPr>
+        <p:style>
+          <a:lnRef idx="2">
+            <a:schemeClr val="accent1"/>
+          </a:lnRef>
+          <a:fillRef idx="0">
+            <a:schemeClr val="accent1"/>
+          </a:fillRef>
+          <a:effectRef idx="1">
+            <a:schemeClr val="accent1"/>
+          </a:effectRef>
+          <a:fontRef idx="minor">
+            <a:schemeClr val="tx1"/>
+          </a:fontRef>
+        </p:style>
+      </p:cxnSp>
+      <p:sp>
+        <p:nvSpPr>
+          <p:cNvPr id="17" name="Rounded Rectangle 16"/>
+          <p:cNvSpPr/>
+          <p:nvPr/>
+        </p:nvSpPr>
+        <p:spPr>
+          <a:xfrm>
+            <a:off x="7406640" y="2029968"/>
+            <a:ext cx="2084831" cy="713232"/>
+          </a:xfrm>
+          <a:prstGeom prst="roundRect">
+            <a:avLst>
+              <a:gd name="adj" fmla="val 16000"/>
+            </a:avLst>
+          </a:prstGeom>
+          <a:solidFill>
+            <a:srgbClr val="1B2A4A"/>
+          </a:solidFill>
+          <a:ln>
+            <a:noFill/>
+          </a:ln>
+          <a:effectLst/>
+        </p:spPr>
+        <p:style>
+          <a:lnRef idx="1">
+            <a:schemeClr val="accent1"/>
+          </a:lnRef>
+          <a:fillRef idx="3">
+            <a:schemeClr val="accent1"/>
+          </a:fillRef>
+          <a:effectRef idx="2">
+            <a:schemeClr val="accent1"/>
+          </a:effectRef>
+          <a:fontRef idx="minor">
+            <a:schemeClr val="lt1"/>
+          </a:fontRef>
+        </p:style>
+        <p:txBody>
+          <a:bodyPr rtlCol="0" anchor="ctr" wrap="square" lIns="45720" rIns="45720" tIns="18288" bIns="18288"/>
+          <a:lstStyle/>
+          <a:p>
+            <a:pPr algn="ctr">
+              <a:lnSpc>
+                <a:spcPct val="98000"/>
+              </a:lnSpc>
+            </a:pPr>
+            <a:r>
+              <a:rPr sz="950" b="1" i="0">
+                <a:solidFill>
+                  <a:srgbClr val="FFFFFF"/>
+                </a:solidFill>
+                <a:latin typeface="Microsoft YaHei"/>
+                <a:ea typeface="Microsoft YaHei"/>
+              </a:rPr>
+              <a:t>node --test</a:t>
+            </a:r>
+          </a:p>
+          <a:p>
+            <a:pPr algn="ctr">
+              <a:lnSpc>
+                <a:spcPct val="98000"/>
+              </a:lnSpc>
+            </a:pPr>
+            <a:r>
+              <a:rPr sz="950" b="1" i="0">
+                <a:solidFill>
+                  <a:srgbClr val="FFFFFF"/>
+                </a:solidFill>
+                <a:latin typeface="Microsoft YaHei"/>
+                <a:ea typeface="Microsoft YaHei"/>
+              </a:rPr>
+              <a:t>自动执行</a:t>
+            </a:r>
+          </a:p>
+        </p:txBody>
+      </p:sp>
+      <p:cxnSp>
+        <p:nvCxnSpPr>
+          <p:cNvPr id="18" name="Connector 17"/>
+          <p:cNvCxnSpPr/>
+          <p:nvPr/>
+        </p:nvCxnSpPr>
+        <p:spPr>
+          <a:xfrm>
+            <a:off x="9500615" y="2386584"/>
+            <a:ext cx="182881" cy="0"/>
+          </a:xfrm>
+          <a:prstGeom prst="line">
+            <a:avLst/>
+          </a:prstGeom>
+          <a:ln w="20320">
+            <a:solidFill>
+              <a:srgbClr val="516585"/>
+            </a:solidFill>
+            <a:tailEnd type="triangle" w="med" len="med"/>
+          </a:ln>
+          <a:effectLst/>
+        </p:spPr>
+        <p:style>
+          <a:lnRef idx="2">
+            <a:schemeClr val="accent1"/>
+          </a:lnRef>
+          <a:fillRef idx="0">
+            <a:schemeClr val="accent1"/>
+          </a:fillRef>
+          <a:effectRef idx="1">
+            <a:schemeClr val="accent1"/>
+          </a:effectRef>
+          <a:fontRef idx="minor">
+            <a:schemeClr val="tx1"/>
+          </a:fontRef>
+        </p:style>
+      </p:cxnSp>
+      <p:sp>
+        <p:nvSpPr>
+          <p:cNvPr id="19" name="Rounded Rectangle 18"/>
+          <p:cNvSpPr/>
+          <p:nvPr/>
+        </p:nvSpPr>
+        <p:spPr>
+          <a:xfrm>
+            <a:off x="9692640" y="2029968"/>
+            <a:ext cx="2084831" cy="713232"/>
+          </a:xfrm>
+          <a:prstGeom prst="roundRect">
+            <a:avLst>
+              <a:gd name="adj" fmla="val 16000"/>
+            </a:avLst>
+          </a:prstGeom>
+          <a:solidFill>
+            <a:srgbClr val="2E8B57"/>
+          </a:solidFill>
+          <a:ln>
+            <a:noFill/>
+          </a:ln>
+          <a:effectLst/>
+        </p:spPr>
+        <p:style>
+          <a:lnRef idx="1">
+            <a:schemeClr val="accent1"/>
+          </a:lnRef>
+          <a:fillRef idx="3">
+            <a:schemeClr val="accent1"/>
+          </a:fillRef>
+          <a:effectRef idx="2">
+            <a:schemeClr val="accent1"/>
+          </a:effectRef>
+          <a:fontRef idx="minor">
+            <a:schemeClr val="lt1"/>
+          </a:fontRef>
+        </p:style>
+        <p:txBody>
+          <a:bodyPr rtlCol="0" anchor="ctr" wrap="square" lIns="45720" rIns="45720" tIns="18288" bIns="18288"/>
+          <a:lstStyle/>
+          <a:p>
+            <a:pPr algn="ctr">
+              <a:lnSpc>
+                <a:spcPct val="98000"/>
+              </a:lnSpc>
+            </a:pPr>
+            <a:r>
+              <a:rPr sz="950" b="1" i="0">
+                <a:solidFill>
+                  <a:srgbClr val="24324E"/>
+                </a:solidFill>
+                <a:latin typeface="Microsoft YaHei"/>
+                <a:ea typeface="Microsoft YaHei"/>
+              </a:rPr>
+              <a:t>24 / 24 全部通过</a:t>
+            </a:r>
+          </a:p>
+        </p:txBody>
+      </p:sp>
+      <p:sp>
+        <p:nvSpPr>
+          <p:cNvPr id="20" name="Rounded Rectangle 19"/>
+          <p:cNvSpPr/>
+          <p:nvPr/>
+        </p:nvSpPr>
+        <p:spPr>
+          <a:xfrm>
+            <a:off x="502920" y="2962656"/>
+            <a:ext cx="6126480" cy="3218688"/>
+          </a:xfrm>
+          <a:prstGeom prst="roundRect">
+            <a:avLst>
+              <a:gd name="adj" fmla="val 6000"/>
+            </a:avLst>
+          </a:prstGeom>
+          <a:solidFill>
+            <a:srgbClr val="F4F7FB"/>
+          </a:solidFill>
+          <a:ln w="9525">
+            <a:solidFill>
+              <a:srgbClr val="DDE5F0"/>
+            </a:solidFill>
+          </a:ln>
+          <a:effectLst/>
+        </p:spPr>
+        <p:style>
+          <a:lnRef idx="1">
+            <a:schemeClr val="accent1"/>
+          </a:lnRef>
+          <a:fillRef idx="3">
+            <a:schemeClr val="accent1"/>
+          </a:fillRef>
+          <a:effectRef idx="2">
+            <a:schemeClr val="accent1"/>
+          </a:effectRef>
+          <a:fontRef idx="minor">
+            <a:schemeClr val="lt1"/>
+          </a:fontRef>
+        </p:style>
+        <p:txBody>
+          <a:bodyPr rtlCol="0" anchor="ctr" wrap="square" lIns="45720" rIns="45720" tIns="18288" bIns="18288"/>
+          <a:lstStyle/>
+          <a:p>
+            <a:pPr algn="ctr">
+              <a:lnSpc>
+                <a:spcPct val="98000"/>
+              </a:lnSpc>
+            </a:pPr>
+            <a:r>
+              <a:rPr sz="1000" b="0" i="0">
+                <a:solidFill>
+                  <a:srgbClr val="24324E"/>
+                </a:solidFill>
+                <a:latin typeface="Microsoft YaHei"/>
+                <a:ea typeface="Microsoft YaHei"/>
+              </a:rPr>
+              <a:t/>
+            </a:r>
+          </a:p>
+        </p:txBody>
+      </p:sp>
+      <p:sp>
+        <p:nvSpPr>
+          <p:cNvPr id="21" name="TextBox 20"/>
+          <p:cNvSpPr txBox="1"/>
+          <p:nvPr/>
+        </p:nvSpPr>
+        <p:spPr>
+          <a:xfrm>
+            <a:off x="640080" y="3035808"/>
+            <a:ext cx="5943600" cy="274320"/>
+          </a:xfrm>
+          <a:prstGeom prst="rect">
+            <a:avLst/>
+          </a:prstGeom>
+          <a:noFill/>
+        </p:spPr>
+        <p:txBody>
+          <a:bodyPr wrap="square" anchor="ctr" lIns="45720" rIns="45720" tIns="18288" bIns="18288">
+            <a:spAutoFit/>
+          </a:bodyPr>
+          <a:lstStyle/>
+          <a:p>
+            <a:pPr algn="l">
+              <a:lnSpc>
+                <a:spcPct val="98000"/>
+              </a:lnSpc>
+            </a:pPr>
+            <a:r>
+              <a:rPr sz="1050" b="1" i="0">
+                <a:solidFill>
+                  <a:srgbClr val="2E8B57"/>
+                </a:solidFill>
+                <a:latin typeface="Microsoft YaHei"/>
+                <a:ea typeface="Microsoft YaHei"/>
+              </a:rPr>
+              <a:t>用例分组与代表性断言（ADR-0001 ~ 0009 · 24 条）</a:t>
+            </a:r>
+          </a:p>
+        </p:txBody>
+      </p:sp>
+      <p:sp>
+        <p:nvSpPr>
+          <p:cNvPr id="22" name="Rounded Rectangle 21"/>
+          <p:cNvSpPr/>
+          <p:nvPr/>
+        </p:nvSpPr>
+        <p:spPr>
+          <a:xfrm>
+            <a:off x="640080" y="3364992"/>
+            <a:ext cx="713232" cy="256032"/>
+          </a:xfrm>
+          <a:prstGeom prst="roundRect">
+            <a:avLst>
+              <a:gd name="adj" fmla="val 50000"/>
+            </a:avLst>
+          </a:prstGeom>
+          <a:solidFill>
+            <a:srgbClr val="E1F1F2"/>
+          </a:solidFill>
+          <a:ln>
+            <a:noFill/>
+          </a:ln>
+          <a:effectLst/>
+        </p:spPr>
+        <p:style>
+          <a:lnRef idx="1">
+            <a:schemeClr val="accent1"/>
+          </a:lnRef>
+          <a:fillRef idx="3">
+            <a:schemeClr val="accent1"/>
+          </a:fillRef>
+          <a:effectRef idx="2">
+            <a:schemeClr val="accent1"/>
+          </a:effectRef>
+          <a:fontRef idx="minor">
+            <a:schemeClr val="lt1"/>
+          </a:fontRef>
+        </p:style>
+        <p:txBody>
+          <a:bodyPr rtlCol="0" anchor="ctr" wrap="square" lIns="45720" rIns="45720" tIns="18288" bIns="18288"/>
+          <a:lstStyle/>
+          <a:p>
+            <a:pPr algn="ctr">
+              <a:lnSpc>
+                <a:spcPct val="98000"/>
+              </a:lnSpc>
+            </a:pPr>
+            <a:r>
+              <a:rPr sz="800" b="1" i="0">
+                <a:solidFill>
+                  <a:srgbClr val="0E7C86"/>
+                </a:solidFill>
+                <a:latin typeface="Microsoft YaHei"/>
+                <a:ea typeface="Microsoft YaHei"/>
+              </a:rPr>
+              <a:t>ADR-0001</a:t>
+            </a:r>
+          </a:p>
+        </p:txBody>
+      </p:sp>
+      <p:sp>
+        <p:nvSpPr>
+          <p:cNvPr id="23" name="TextBox 22"/>
+          <p:cNvSpPr txBox="1"/>
+          <p:nvPr/>
+        </p:nvSpPr>
+        <p:spPr>
+          <a:xfrm>
+            <a:off x="1426464" y="3351276"/>
+            <a:ext cx="2212848" cy="274320"/>
+          </a:xfrm>
+          <a:prstGeom prst="rect">
+            <a:avLst/>
+          </a:prstGeom>
+          <a:noFill/>
+        </p:spPr>
+        <p:txBody>
+          <a:bodyPr wrap="square" anchor="ctr" lIns="45720" rIns="45720" tIns="18288" bIns="18288">
+            <a:spAutoFit/>
+          </a:bodyPr>
+          <a:lstStyle/>
+          <a:p>
+            <a:pPr algn="l">
+              <a:lnSpc>
+                <a:spcPct val="98000"/>
+              </a:lnSpc>
+            </a:pPr>
+            <a:r>
+              <a:rPr sz="850" b="1" i="0">
+                <a:solidFill>
+                  <a:srgbClr val="24324E"/>
+                </a:solidFill>
+                <a:latin typeface="Microsoft YaHei"/>
+                <a:ea typeface="Microsoft YaHei"/>
+              </a:rPr>
+              <a:t>单笔订单仅绑定单一持有人</a:t>
+            </a:r>
+          </a:p>
+        </p:txBody>
+      </p:sp>
+      <p:sp>
+        <p:nvSpPr>
+          <p:cNvPr id="24" name="TextBox 23"/>
+          <p:cNvSpPr txBox="1"/>
+          <p:nvPr/>
+        </p:nvSpPr>
+        <p:spPr>
+          <a:xfrm>
+            <a:off x="3657600" y="3351276"/>
+            <a:ext cx="2377440" cy="274320"/>
+          </a:xfrm>
+          <a:prstGeom prst="rect">
+            <a:avLst/>
+          </a:prstGeom>
+          <a:noFill/>
+        </p:spPr>
+        <p:txBody>
+          <a:bodyPr wrap="square" anchor="ctr" lIns="45720" rIns="45720" tIns="18288" bIns="18288">
+            <a:spAutoFit/>
+          </a:bodyPr>
+          <a:lstStyle/>
+          <a:p>
+            <a:pPr algn="l">
+              <a:lnSpc>
+                <a:spcPct val="98000"/>
+              </a:lnSpc>
+            </a:pPr>
+            <a:r>
+              <a:rPr sz="800" b="0" i="0">
+                <a:solidFill>
+                  <a:srgbClr val="4A556C"/>
+                </a:solidFill>
+                <a:latin typeface="Microsoft YaHei"/>
+                <a:ea typeface="Microsoft YaHei"/>
+              </a:rPr>
+              <a:t>1 单 1 人强约束 · 拆单独立闭环</a:t>
+            </a:r>
+          </a:p>
+        </p:txBody>
+      </p:sp>
+      <p:sp>
+        <p:nvSpPr>
+          <p:cNvPr id="25" name="TextBox 24"/>
+          <p:cNvSpPr txBox="1"/>
+          <p:nvPr/>
+        </p:nvSpPr>
+        <p:spPr>
+          <a:xfrm>
+            <a:off x="6144768" y="3351276"/>
+            <a:ext cx="411480" cy="274320"/>
+          </a:xfrm>
+          <a:prstGeom prst="rect">
+            <a:avLst/>
+          </a:prstGeom>
+          <a:noFill/>
+        </p:spPr>
+        <p:txBody>
+          <a:bodyPr wrap="square" anchor="ctr" lIns="45720" rIns="45720" tIns="18288" bIns="18288">
+            <a:spAutoFit/>
+          </a:bodyPr>
+          <a:lstStyle/>
+          <a:p>
+            <a:pPr algn="r">
+              <a:lnSpc>
+                <a:spcPct val="98000"/>
+              </a:lnSpc>
+            </a:pPr>
+            <a:r>
+              <a:rPr sz="850" b="1" i="0">
+                <a:solidFill>
+                  <a:srgbClr val="2E8B57"/>
+                </a:solidFill>
+                <a:latin typeface="Microsoft YaHei"/>
+                <a:ea typeface="Microsoft YaHei"/>
+              </a:rPr>
+              <a:t>2/2</a:t>
+            </a:r>
+          </a:p>
+        </p:txBody>
+      </p:sp>
+      <p:sp>
+        <p:nvSpPr>
+          <p:cNvPr id="26" name="Rounded Rectangle 25"/>
+          <p:cNvSpPr/>
+          <p:nvPr/>
+        </p:nvSpPr>
+        <p:spPr>
+          <a:xfrm>
+            <a:off x="640080" y="3671316"/>
+            <a:ext cx="713232" cy="256032"/>
+          </a:xfrm>
+          <a:prstGeom prst="roundRect">
+            <a:avLst>
+              <a:gd name="adj" fmla="val 50000"/>
+            </a:avLst>
+          </a:prstGeom>
+          <a:solidFill>
+            <a:srgbClr val="E1F1F2"/>
+          </a:solidFill>
+          <a:ln>
+            <a:noFill/>
+          </a:ln>
+          <a:effectLst/>
+        </p:spPr>
+        <p:style>
+          <a:lnRef idx="1">
+            <a:schemeClr val="accent1"/>
+          </a:lnRef>
+          <a:fillRef idx="3">
+            <a:schemeClr val="accent1"/>
+          </a:fillRef>
+          <a:effectRef idx="2">
+            <a:schemeClr val="accent1"/>
+          </a:effectRef>
+          <a:fontRef idx="minor">
+            <a:schemeClr val="lt1"/>
+          </a:fontRef>
+        </p:style>
+        <p:txBody>
+          <a:bodyPr rtlCol="0" anchor="ctr" wrap="square" lIns="45720" rIns="45720" tIns="18288" bIns="18288"/>
+          <a:lstStyle/>
+          <a:p>
+            <a:pPr algn="ctr">
+              <a:lnSpc>
+                <a:spcPct val="98000"/>
+              </a:lnSpc>
+            </a:pPr>
+            <a:r>
+              <a:rPr sz="800" b="1" i="0">
+                <a:solidFill>
+                  <a:srgbClr val="0E7C86"/>
+                </a:solidFill>
+                <a:latin typeface="Microsoft YaHei"/>
+                <a:ea typeface="Microsoft YaHei"/>
+              </a:rPr>
+              <a:t>ADR-0002</a:t>
+            </a:r>
+          </a:p>
+        </p:txBody>
+      </p:sp>
+      <p:sp>
+        <p:nvSpPr>
+          <p:cNvPr id="27" name="TextBox 26"/>
+          <p:cNvSpPr txBox="1"/>
+          <p:nvPr/>
+        </p:nvSpPr>
+        <p:spPr>
+          <a:xfrm>
+            <a:off x="1426464" y="3657600"/>
+            <a:ext cx="2212848" cy="274320"/>
+          </a:xfrm>
+          <a:prstGeom prst="rect">
+            <a:avLst/>
+          </a:prstGeom>
+          <a:noFill/>
+        </p:spPr>
+        <p:txBody>
+          <a:bodyPr wrap="square" anchor="ctr" lIns="45720" rIns="45720" tIns="18288" bIns="18288">
+            <a:spAutoFit/>
+          </a:bodyPr>
+          <a:lstStyle/>
+          <a:p>
+            <a:pPr algn="l">
+              <a:lnSpc>
+                <a:spcPct val="98000"/>
+              </a:lnSpc>
+            </a:pPr>
+            <a:r>
+              <a:rPr sz="850" b="1" i="0">
+                <a:solidFill>
+                  <a:srgbClr val="24324E"/>
+                </a:solidFill>
+                <a:latin typeface="Microsoft YaHei"/>
+                <a:ea typeface="Microsoft YaHei"/>
+              </a:rPr>
+              <a:t>预约取消与退款双轨联动</a:t>
+            </a:r>
+          </a:p>
+        </p:txBody>
+      </p:sp>
+      <p:sp>
+        <p:nvSpPr>
+          <p:cNvPr id="28" name="TextBox 27"/>
+          <p:cNvSpPr txBox="1"/>
+          <p:nvPr/>
+        </p:nvSpPr>
+        <p:spPr>
+          <a:xfrm>
+            <a:off x="3657600" y="3657600"/>
+            <a:ext cx="2377440" cy="274320"/>
+          </a:xfrm>
+          <a:prstGeom prst="rect">
+            <a:avLst/>
+          </a:prstGeom>
+          <a:noFill/>
+        </p:spPr>
+        <p:txBody>
+          <a:bodyPr wrap="square" anchor="ctr" lIns="45720" rIns="45720" tIns="18288" bIns="18288">
+            <a:spAutoFit/>
+          </a:bodyPr>
+          <a:lstStyle/>
+          <a:p>
+            <a:pPr algn="l">
+              <a:lnSpc>
+                <a:spcPct val="98000"/>
+              </a:lnSpc>
+            </a:pPr>
+            <a:r>
+              <a:rPr sz="800" b="0" i="0">
+                <a:solidFill>
+                  <a:srgbClr val="4A556C"/>
+                </a:solidFill>
+                <a:latin typeface="Microsoft YaHei"/>
+                <a:ea typeface="Microsoft YaHei"/>
+              </a:rPr>
+              <a:t>级联取消预约 · 双路径状态收敛</a:t>
+            </a:r>
+          </a:p>
+        </p:txBody>
+      </p:sp>
+      <p:sp>
+        <p:nvSpPr>
+          <p:cNvPr id="29" name="TextBox 28"/>
+          <p:cNvSpPr txBox="1"/>
+          <p:nvPr/>
+        </p:nvSpPr>
+        <p:spPr>
+          <a:xfrm>
+            <a:off x="6144768" y="3657600"/>
+            <a:ext cx="411480" cy="274320"/>
+          </a:xfrm>
+          <a:prstGeom prst="rect">
+            <a:avLst/>
+          </a:prstGeom>
+          <a:noFill/>
+        </p:spPr>
+        <p:txBody>
+          <a:bodyPr wrap="square" anchor="ctr" lIns="45720" rIns="45720" tIns="18288" bIns="18288">
+            <a:spAutoFit/>
+          </a:bodyPr>
+          <a:lstStyle/>
+          <a:p>
+            <a:pPr algn="r">
+              <a:lnSpc>
+                <a:spcPct val="98000"/>
+              </a:lnSpc>
+            </a:pPr>
+            <a:r>
+              <a:rPr sz="850" b="1" i="0">
+                <a:solidFill>
+                  <a:srgbClr val="2E8B57"/>
+                </a:solidFill>
+                <a:latin typeface="Microsoft YaHei"/>
+                <a:ea typeface="Microsoft YaHei"/>
+              </a:rPr>
+              <a:t>2/2</a:t>
+            </a:r>
+          </a:p>
+        </p:txBody>
+      </p:sp>
+      <p:sp>
+        <p:nvSpPr>
+          <p:cNvPr id="30" name="Rounded Rectangle 29"/>
+          <p:cNvSpPr/>
+          <p:nvPr/>
+        </p:nvSpPr>
+        <p:spPr>
+          <a:xfrm>
+            <a:off x="640080" y="3977640"/>
+            <a:ext cx="713232" cy="256032"/>
+          </a:xfrm>
+          <a:prstGeom prst="roundRect">
+            <a:avLst>
+              <a:gd name="adj" fmla="val 50000"/>
+            </a:avLst>
+          </a:prstGeom>
+          <a:solidFill>
+            <a:srgbClr val="E1F1F2"/>
+          </a:solidFill>
+          <a:ln>
+            <a:noFill/>
+          </a:ln>
+          <a:effectLst/>
+        </p:spPr>
+        <p:style>
+          <a:lnRef idx="1">
+            <a:schemeClr val="accent1"/>
+          </a:lnRef>
+          <a:fillRef idx="3">
+            <a:schemeClr val="accent1"/>
+          </a:fillRef>
+          <a:effectRef idx="2">
+            <a:schemeClr val="accent1"/>
+          </a:effectRef>
+          <a:fontRef idx="minor">
+            <a:schemeClr val="lt1"/>
+          </a:fontRef>
+        </p:style>
+        <p:txBody>
+          <a:bodyPr rtlCol="0" anchor="ctr" wrap="square" lIns="45720" rIns="45720" tIns="18288" bIns="18288"/>
+          <a:lstStyle/>
+          <a:p>
+            <a:pPr algn="ctr">
+              <a:lnSpc>
+                <a:spcPct val="98000"/>
+              </a:lnSpc>
+            </a:pPr>
+            <a:r>
+              <a:rPr sz="800" b="1" i="0">
+                <a:solidFill>
+                  <a:srgbClr val="0E7C86"/>
+                </a:solidFill>
+                <a:latin typeface="Microsoft YaHei"/>
+                <a:ea typeface="Microsoft YaHei"/>
+              </a:rPr>
+              <a:t>ADR-0003</a:t>
+            </a:r>
+          </a:p>
+        </p:txBody>
+      </p:sp>
+      <p:sp>
+        <p:nvSpPr>
+          <p:cNvPr id="31" name="TextBox 30"/>
+          <p:cNvSpPr txBox="1"/>
+          <p:nvPr/>
+        </p:nvSpPr>
+        <p:spPr>
+          <a:xfrm>
+            <a:off x="1426464" y="3963924"/>
+            <a:ext cx="2212848" cy="274320"/>
+          </a:xfrm>
+          <a:prstGeom prst="rect">
+            <a:avLst/>
+          </a:prstGeom>
+          <a:noFill/>
+        </p:spPr>
+        <p:txBody>
+          <a:bodyPr wrap="square" anchor="ctr" lIns="45720" rIns="45720" tIns="18288" bIns="18288">
+            <a:spAutoFit/>
+          </a:bodyPr>
+          <a:lstStyle/>
+          <a:p>
+            <a:pPr algn="l">
+              <a:lnSpc>
+                <a:spcPct val="98000"/>
+              </a:lnSpc>
+            </a:pPr>
+            <a:r>
+              <a:rPr sz="850" b="1" i="0">
+                <a:solidFill>
+                  <a:srgbClr val="24324E"/>
+                </a:solidFill>
+                <a:latin typeface="Microsoft YaHei"/>
+                <a:ea typeface="Microsoft YaHei"/>
+              </a:rPr>
+              <a:t>组合订单支付瞬态包装器</a:t>
+            </a:r>
+          </a:p>
+        </p:txBody>
+      </p:sp>
+      <p:sp>
+        <p:nvSpPr>
+          <p:cNvPr id="32" name="TextBox 31"/>
+          <p:cNvSpPr txBox="1"/>
+          <p:nvPr/>
+        </p:nvSpPr>
+        <p:spPr>
+          <a:xfrm>
+            <a:off x="3657600" y="3963924"/>
+            <a:ext cx="2377440" cy="274320"/>
+          </a:xfrm>
+          <a:prstGeom prst="rect">
+            <a:avLst/>
+          </a:prstGeom>
+          <a:noFill/>
+        </p:spPr>
+        <p:txBody>
+          <a:bodyPr wrap="square" anchor="ctr" lIns="45720" rIns="45720" tIns="18288" bIns="18288">
+            <a:spAutoFit/>
+          </a:bodyPr>
+          <a:lstStyle/>
+          <a:p>
+            <a:pPr algn="l">
+              <a:lnSpc>
+                <a:spcPct val="98000"/>
+              </a:lnSpc>
+            </a:pPr>
+            <a:r>
+              <a:rPr sz="800" b="0" i="0">
+                <a:solidFill>
+                  <a:srgbClr val="4A556C"/>
+                </a:solidFill>
+                <a:latin typeface="Microsoft YaHei"/>
+                <a:ea typeface="Microsoft YaHei"/>
+              </a:rPr>
+              <a:t>合单收银 · 支付后解体 · 超时回退</a:t>
+            </a:r>
+          </a:p>
+        </p:txBody>
+      </p:sp>
+      <p:sp>
+        <p:nvSpPr>
+          <p:cNvPr id="33" name="TextBox 32"/>
+          <p:cNvSpPr txBox="1"/>
+          <p:nvPr/>
+        </p:nvSpPr>
+        <p:spPr>
+          <a:xfrm>
+            <a:off x="6144768" y="3963924"/>
+            <a:ext cx="411480" cy="274320"/>
+          </a:xfrm>
+          <a:prstGeom prst="rect">
+            <a:avLst/>
+          </a:prstGeom>
+          <a:noFill/>
+        </p:spPr>
+        <p:txBody>
+          <a:bodyPr wrap="square" anchor="ctr" lIns="45720" rIns="45720" tIns="18288" bIns="18288">
+            <a:spAutoFit/>
+          </a:bodyPr>
+          <a:lstStyle/>
+          <a:p>
+            <a:pPr algn="r">
+              <a:lnSpc>
+                <a:spcPct val="98000"/>
+              </a:lnSpc>
+            </a:pPr>
+            <a:r>
+              <a:rPr sz="850" b="1" i="0">
+                <a:solidFill>
+                  <a:srgbClr val="2E8B57"/>
+                </a:solidFill>
+                <a:latin typeface="Microsoft YaHei"/>
+                <a:ea typeface="Microsoft YaHei"/>
+              </a:rPr>
+              <a:t>4/4</a:t>
+            </a:r>
+          </a:p>
+        </p:txBody>
+      </p:sp>
+      <p:sp>
+        <p:nvSpPr>
+          <p:cNvPr id="34" name="Rounded Rectangle 33"/>
+          <p:cNvSpPr/>
+          <p:nvPr/>
+        </p:nvSpPr>
+        <p:spPr>
+          <a:xfrm>
+            <a:off x="640080" y="4283964"/>
+            <a:ext cx="713232" cy="256032"/>
+          </a:xfrm>
+          <a:prstGeom prst="roundRect">
+            <a:avLst>
+              <a:gd name="adj" fmla="val 50000"/>
+            </a:avLst>
+          </a:prstGeom>
+          <a:solidFill>
+            <a:srgbClr val="E1F1F2"/>
+          </a:solidFill>
+          <a:ln>
+            <a:noFill/>
+          </a:ln>
+          <a:effectLst/>
+        </p:spPr>
+        <p:style>
+          <a:lnRef idx="1">
+            <a:schemeClr val="accent1"/>
+          </a:lnRef>
+          <a:fillRef idx="3">
+            <a:schemeClr val="accent1"/>
+          </a:fillRef>
+          <a:effectRef idx="2">
+            <a:schemeClr val="accent1"/>
+          </a:effectRef>
+          <a:fontRef idx="minor">
+            <a:schemeClr val="lt1"/>
+          </a:fontRef>
+        </p:style>
+        <p:txBody>
+          <a:bodyPr rtlCol="0" anchor="ctr" wrap="square" lIns="45720" rIns="45720" tIns="18288" bIns="18288"/>
+          <a:lstStyle/>
+          <a:p>
+            <a:pPr algn="ctr">
+              <a:lnSpc>
+                <a:spcPct val="98000"/>
+              </a:lnSpc>
+            </a:pPr>
+            <a:r>
+              <a:rPr sz="800" b="1" i="0">
+                <a:solidFill>
+                  <a:srgbClr val="0E7C86"/>
+                </a:solidFill>
+                <a:latin typeface="Microsoft YaHei"/>
+                <a:ea typeface="Microsoft YaHei"/>
+              </a:rPr>
+              <a:t>ADR-0004</a:t>
+            </a:r>
+          </a:p>
+        </p:txBody>
+      </p:sp>
+      <p:sp>
+        <p:nvSpPr>
+          <p:cNvPr id="35" name="TextBox 34"/>
+          <p:cNvSpPr txBox="1"/>
+          <p:nvPr/>
+        </p:nvSpPr>
+        <p:spPr>
+          <a:xfrm>
+            <a:off x="1426464" y="4270248"/>
+            <a:ext cx="2212848" cy="274320"/>
+          </a:xfrm>
+          <a:prstGeom prst="rect">
+            <a:avLst/>
+          </a:prstGeom>
+          <a:noFill/>
+        </p:spPr>
+        <p:txBody>
+          <a:bodyPr wrap="square" anchor="ctr" lIns="45720" rIns="45720" tIns="18288" bIns="18288">
+            <a:spAutoFit/>
+          </a:bodyPr>
+          <a:lstStyle/>
+          <a:p>
+            <a:pPr algn="l">
+              <a:lnSpc>
+                <a:spcPct val="98000"/>
+              </a:lnSpc>
+            </a:pPr>
+            <a:r>
+              <a:rPr sz="850" b="1" i="0">
+                <a:solidFill>
+                  <a:srgbClr val="24324E"/>
+                </a:solidFill>
+                <a:latin typeface="Microsoft YaHei"/>
+                <a:ea typeface="Microsoft YaHei"/>
+              </a:rPr>
+              <a:t>积分抵扣与子订单分摊</a:t>
+            </a:r>
+          </a:p>
+        </p:txBody>
+      </p:sp>
+      <p:sp>
+        <p:nvSpPr>
+          <p:cNvPr id="36" name="TextBox 35"/>
+          <p:cNvSpPr txBox="1"/>
+          <p:nvPr/>
+        </p:nvSpPr>
+        <p:spPr>
+          <a:xfrm>
+            <a:off x="3657600" y="4270248"/>
+            <a:ext cx="2377440" cy="274320"/>
+          </a:xfrm>
+          <a:prstGeom prst="rect">
+            <a:avLst/>
+          </a:prstGeom>
+          <a:noFill/>
+        </p:spPr>
+        <p:txBody>
+          <a:bodyPr wrap="square" anchor="ctr" lIns="45720" rIns="45720" tIns="18288" bIns="18288">
+            <a:spAutoFit/>
+          </a:bodyPr>
+          <a:lstStyle/>
+          <a:p>
+            <a:pPr algn="l">
+              <a:lnSpc>
+                <a:spcPct val="98000"/>
+              </a:lnSpc>
+            </a:pPr>
+            <a:r>
+              <a:rPr sz="800" b="0" i="0">
+                <a:solidFill>
+                  <a:srgbClr val="4A556C"/>
+                </a:solidFill>
+                <a:latin typeface="Microsoft YaHei"/>
+                <a:ea typeface="Microsoft YaHei"/>
+              </a:rPr>
+              <a:t>1:1 先升舱后加项 · 分摊计算错误拦截</a:t>
+            </a:r>
+          </a:p>
+        </p:txBody>
+      </p:sp>
+      <p:sp>
+        <p:nvSpPr>
+          <p:cNvPr id="37" name="TextBox 36"/>
+          <p:cNvSpPr txBox="1"/>
+          <p:nvPr/>
+        </p:nvSpPr>
+        <p:spPr>
+          <a:xfrm>
+            <a:off x="6144768" y="4270248"/>
+            <a:ext cx="411480" cy="274320"/>
+          </a:xfrm>
+          <a:prstGeom prst="rect">
+            <a:avLst/>
+          </a:prstGeom>
+          <a:noFill/>
+        </p:spPr>
+        <p:txBody>
+          <a:bodyPr wrap="square" anchor="ctr" lIns="45720" rIns="45720" tIns="18288" bIns="18288">
+            <a:spAutoFit/>
+          </a:bodyPr>
+          <a:lstStyle/>
+          <a:p>
+            <a:pPr algn="r">
+              <a:lnSpc>
+                <a:spcPct val="98000"/>
+              </a:lnSpc>
+            </a:pPr>
+            <a:r>
+              <a:rPr sz="850" b="1" i="0">
+                <a:solidFill>
+                  <a:srgbClr val="2E8B57"/>
+                </a:solidFill>
+                <a:latin typeface="Microsoft YaHei"/>
+                <a:ea typeface="Microsoft YaHei"/>
+              </a:rPr>
+              <a:t>2/2</a:t>
+            </a:r>
+          </a:p>
+        </p:txBody>
+      </p:sp>
+      <p:sp>
+        <p:nvSpPr>
+          <p:cNvPr id="38" name="Rounded Rectangle 37"/>
+          <p:cNvSpPr/>
+          <p:nvPr/>
+        </p:nvSpPr>
+        <p:spPr>
+          <a:xfrm>
+            <a:off x="640080" y="4590288"/>
+            <a:ext cx="713232" cy="256032"/>
+          </a:xfrm>
+          <a:prstGeom prst="roundRect">
+            <a:avLst>
+              <a:gd name="adj" fmla="val 50000"/>
+            </a:avLst>
+          </a:prstGeom>
+          <a:solidFill>
+            <a:srgbClr val="E1F1F2"/>
+          </a:solidFill>
+          <a:ln>
+            <a:noFill/>
+          </a:ln>
+          <a:effectLst/>
+        </p:spPr>
+        <p:style>
+          <a:lnRef idx="1">
+            <a:schemeClr val="accent1"/>
+          </a:lnRef>
+          <a:fillRef idx="3">
+            <a:schemeClr val="accent1"/>
+          </a:fillRef>
+          <a:effectRef idx="2">
+            <a:schemeClr val="accent1"/>
+          </a:effectRef>
+          <a:fontRef idx="minor">
+            <a:schemeClr val="lt1"/>
+          </a:fontRef>
+        </p:style>
+        <p:txBody>
+          <a:bodyPr rtlCol="0" anchor="ctr" wrap="square" lIns="45720" rIns="45720" tIns="18288" bIns="18288"/>
+          <a:lstStyle/>
+          <a:p>
+            <a:pPr algn="ctr">
+              <a:lnSpc>
+                <a:spcPct val="98000"/>
+              </a:lnSpc>
+            </a:pPr>
+            <a:r>
+              <a:rPr sz="800" b="1" i="0">
+                <a:solidFill>
+                  <a:srgbClr val="0E7C86"/>
+                </a:solidFill>
+                <a:latin typeface="Microsoft YaHei"/>
+                <a:ea typeface="Microsoft YaHei"/>
+              </a:rPr>
+              <a:t>ADR-0005</a:t>
+            </a:r>
+          </a:p>
+        </p:txBody>
+      </p:sp>
+      <p:sp>
+        <p:nvSpPr>
+          <p:cNvPr id="39" name="TextBox 38"/>
+          <p:cNvSpPr txBox="1"/>
+          <p:nvPr/>
+        </p:nvSpPr>
+        <p:spPr>
+          <a:xfrm>
+            <a:off x="1426464" y="4576572"/>
+            <a:ext cx="2212848" cy="274320"/>
+          </a:xfrm>
+          <a:prstGeom prst="rect">
+            <a:avLst/>
+          </a:prstGeom>
+          <a:noFill/>
+        </p:spPr>
+        <p:txBody>
+          <a:bodyPr wrap="square" anchor="ctr" lIns="45720" rIns="45720" tIns="18288" bIns="18288">
+            <a:spAutoFit/>
+          </a:bodyPr>
+          <a:lstStyle/>
+          <a:p>
+            <a:pPr algn="l">
+              <a:lnSpc>
+                <a:spcPct val="98000"/>
+              </a:lnSpc>
+            </a:pPr>
+            <a:r>
+              <a:rPr sz="850" b="1" i="0">
+                <a:solidFill>
+                  <a:srgbClr val="24324E"/>
+                </a:solidFill>
+                <a:latin typeface="Microsoft YaHei"/>
+                <a:ea typeface="Microsoft YaHei"/>
+              </a:rPr>
+              <a:t>回调驱动退积分</a:t>
+            </a:r>
+          </a:p>
+        </p:txBody>
+      </p:sp>
+      <p:sp>
+        <p:nvSpPr>
+          <p:cNvPr id="40" name="TextBox 39"/>
+          <p:cNvSpPr txBox="1"/>
+          <p:nvPr/>
+        </p:nvSpPr>
+        <p:spPr>
+          <a:xfrm>
+            <a:off x="3657600" y="4576572"/>
+            <a:ext cx="2377440" cy="274320"/>
+          </a:xfrm>
+          <a:prstGeom prst="rect">
+            <a:avLst/>
+          </a:prstGeom>
+          <a:noFill/>
+        </p:spPr>
+        <p:txBody>
+          <a:bodyPr wrap="square" anchor="ctr" lIns="45720" rIns="45720" tIns="18288" bIns="18288">
+            <a:spAutoFit/>
+          </a:bodyPr>
+          <a:lstStyle/>
+          <a:p>
+            <a:pPr algn="l">
+              <a:lnSpc>
+                <a:spcPct val="98000"/>
+              </a:lnSpc>
+            </a:pPr>
+            <a:r>
+              <a:rPr sz="800" b="0" i="0">
+                <a:solidFill>
+                  <a:srgbClr val="4A556C"/>
+                </a:solidFill>
+                <a:latin typeface="Microsoft YaHei"/>
+                <a:ea typeface="Microsoft YaHei"/>
+              </a:rPr>
+              <a:t>回调成功才释放 · 提前释放判为严重缺陷</a:t>
+            </a:r>
+          </a:p>
+        </p:txBody>
+      </p:sp>
+      <p:sp>
+        <p:nvSpPr>
+          <p:cNvPr id="41" name="TextBox 40"/>
+          <p:cNvSpPr txBox="1"/>
+          <p:nvPr/>
+        </p:nvSpPr>
+        <p:spPr>
+          <a:xfrm>
+            <a:off x="6144768" y="4576572"/>
+            <a:ext cx="411480" cy="274320"/>
+          </a:xfrm>
+          <a:prstGeom prst="rect">
+            <a:avLst/>
+          </a:prstGeom>
+          <a:noFill/>
+        </p:spPr>
+        <p:txBody>
+          <a:bodyPr wrap="square" anchor="ctr" lIns="45720" rIns="45720" tIns="18288" bIns="18288">
+            <a:spAutoFit/>
+          </a:bodyPr>
+          <a:lstStyle/>
+          <a:p>
+            <a:pPr algn="r">
+              <a:lnSpc>
+                <a:spcPct val="98000"/>
+              </a:lnSpc>
+            </a:pPr>
+            <a:r>
+              <a:rPr sz="850" b="1" i="0">
+                <a:solidFill>
+                  <a:srgbClr val="2E8B57"/>
+                </a:solidFill>
+                <a:latin typeface="Microsoft YaHei"/>
+                <a:ea typeface="Microsoft YaHei"/>
+              </a:rPr>
+              <a:t>2/2</a:t>
+            </a:r>
+          </a:p>
+        </p:txBody>
+      </p:sp>
+      <p:sp>
+        <p:nvSpPr>
+          <p:cNvPr id="42" name="Rounded Rectangle 41"/>
+          <p:cNvSpPr/>
+          <p:nvPr/>
+        </p:nvSpPr>
+        <p:spPr>
+          <a:xfrm>
+            <a:off x="640080" y="4896612"/>
+            <a:ext cx="713232" cy="256032"/>
+          </a:xfrm>
+          <a:prstGeom prst="roundRect">
+            <a:avLst>
+              <a:gd name="adj" fmla="val 50000"/>
+            </a:avLst>
+          </a:prstGeom>
+          <a:solidFill>
+            <a:srgbClr val="E1F1F2"/>
+          </a:solidFill>
+          <a:ln>
+            <a:noFill/>
+          </a:ln>
+          <a:effectLst/>
+        </p:spPr>
+        <p:style>
+          <a:lnRef idx="1">
+            <a:schemeClr val="accent1"/>
+          </a:lnRef>
+          <a:fillRef idx="3">
+            <a:schemeClr val="accent1"/>
+          </a:fillRef>
+          <a:effectRef idx="2">
+            <a:schemeClr val="accent1"/>
+          </a:effectRef>
+          <a:fontRef idx="minor">
+            <a:schemeClr val="lt1"/>
+          </a:fontRef>
+        </p:style>
+        <p:txBody>
+          <a:bodyPr rtlCol="0" anchor="ctr" wrap="square" lIns="45720" rIns="45720" tIns="18288" bIns="18288"/>
+          <a:lstStyle/>
+          <a:p>
+            <a:pPr algn="ctr">
+              <a:lnSpc>
+                <a:spcPct val="98000"/>
+              </a:lnSpc>
+            </a:pPr>
+            <a:r>
+              <a:rPr sz="800" b="1" i="0">
+                <a:solidFill>
+                  <a:srgbClr val="0E7C86"/>
+                </a:solidFill>
+                <a:latin typeface="Microsoft YaHei"/>
+                <a:ea typeface="Microsoft YaHei"/>
+              </a:rPr>
+              <a:t>ADR-0006</a:t>
+            </a:r>
+          </a:p>
+        </p:txBody>
+      </p:sp>
+      <p:sp>
+        <p:nvSpPr>
+          <p:cNvPr id="43" name="TextBox 42"/>
+          <p:cNvSpPr txBox="1"/>
+          <p:nvPr/>
+        </p:nvSpPr>
+        <p:spPr>
+          <a:xfrm>
+            <a:off x="1426464" y="4882896"/>
+            <a:ext cx="2212848" cy="274320"/>
+          </a:xfrm>
+          <a:prstGeom prst="rect">
+            <a:avLst/>
+          </a:prstGeom>
+          <a:noFill/>
+        </p:spPr>
+        <p:txBody>
+          <a:bodyPr wrap="square" anchor="ctr" lIns="45720" rIns="45720" tIns="18288" bIns="18288">
+            <a:spAutoFit/>
+          </a:bodyPr>
+          <a:lstStyle/>
+          <a:p>
+            <a:pPr algn="l">
+              <a:lnSpc>
+                <a:spcPct val="98000"/>
+              </a:lnSpc>
+            </a:pPr>
+            <a:r>
+              <a:rPr sz="850" b="1" i="0">
+                <a:solidFill>
+                  <a:srgbClr val="24324E"/>
+                </a:solidFill>
+                <a:latin typeface="Microsoft YaHei"/>
+                <a:ea typeface="Microsoft YaHei"/>
+              </a:rPr>
+              <a:t>双账本镜像并发双冻结</a:t>
+            </a:r>
+          </a:p>
+        </p:txBody>
+      </p:sp>
+      <p:sp>
+        <p:nvSpPr>
+          <p:cNvPr id="44" name="TextBox 43"/>
+          <p:cNvSpPr txBox="1"/>
+          <p:nvPr/>
+        </p:nvSpPr>
+        <p:spPr>
+          <a:xfrm>
+            <a:off x="3657600" y="4882896"/>
+            <a:ext cx="2377440" cy="274320"/>
+          </a:xfrm>
+          <a:prstGeom prst="rect">
+            <a:avLst/>
+          </a:prstGeom>
+          <a:noFill/>
+        </p:spPr>
+        <p:txBody>
+          <a:bodyPr wrap="square" anchor="ctr" lIns="45720" rIns="45720" tIns="18288" bIns="18288">
+            <a:spAutoFit/>
+          </a:bodyPr>
+          <a:lstStyle/>
+          <a:p>
+            <a:pPr algn="l">
+              <a:lnSpc>
+                <a:spcPct val="98000"/>
+              </a:lnSpc>
+            </a:pPr>
+            <a:r>
+              <a:rPr sz="800" b="0" i="0">
+                <a:solidFill>
+                  <a:srgbClr val="4A556C"/>
+                </a:solidFill>
+                <a:latin typeface="Microsoft YaHei"/>
+                <a:ea typeface="Microsoft YaHei"/>
+              </a:rPr>
+              <a:t>双冻结+SKU 1:1 穿透 · 镜像失败阻断超扣</a:t>
+            </a:r>
+          </a:p>
+        </p:txBody>
+      </p:sp>
+      <p:sp>
+        <p:nvSpPr>
+          <p:cNvPr id="45" name="TextBox 44"/>
+          <p:cNvSpPr txBox="1"/>
+          <p:nvPr/>
+        </p:nvSpPr>
+        <p:spPr>
+          <a:xfrm>
+            <a:off x="6144768" y="4882896"/>
+            <a:ext cx="411480" cy="274320"/>
+          </a:xfrm>
+          <a:prstGeom prst="rect">
+            <a:avLst/>
+          </a:prstGeom>
+          <a:noFill/>
+        </p:spPr>
+        <p:txBody>
+          <a:bodyPr wrap="square" anchor="ctr" lIns="45720" rIns="45720" tIns="18288" bIns="18288">
+            <a:spAutoFit/>
+          </a:bodyPr>
+          <a:lstStyle/>
+          <a:p>
+            <a:pPr algn="r">
+              <a:lnSpc>
+                <a:spcPct val="98000"/>
+              </a:lnSpc>
+            </a:pPr>
+            <a:r>
+              <a:rPr sz="850" b="1" i="0">
+                <a:solidFill>
+                  <a:srgbClr val="2E8B57"/>
+                </a:solidFill>
+                <a:latin typeface="Microsoft YaHei"/>
+                <a:ea typeface="Microsoft YaHei"/>
+              </a:rPr>
+              <a:t>2/2</a:t>
+            </a:r>
+          </a:p>
+        </p:txBody>
+      </p:sp>
+      <p:sp>
+        <p:nvSpPr>
+          <p:cNvPr id="46" name="Rounded Rectangle 45"/>
+          <p:cNvSpPr/>
+          <p:nvPr/>
+        </p:nvSpPr>
+        <p:spPr>
+          <a:xfrm>
+            <a:off x="640080" y="5202936"/>
+            <a:ext cx="713232" cy="256032"/>
+          </a:xfrm>
+          <a:prstGeom prst="roundRect">
+            <a:avLst>
+              <a:gd name="adj" fmla="val 50000"/>
+            </a:avLst>
+          </a:prstGeom>
+          <a:solidFill>
+            <a:srgbClr val="E1F1F2"/>
+          </a:solidFill>
+          <a:ln>
+            <a:noFill/>
+          </a:ln>
+          <a:effectLst/>
+        </p:spPr>
+        <p:style>
+          <a:lnRef idx="1">
+            <a:schemeClr val="accent1"/>
+          </a:lnRef>
+          <a:fillRef idx="3">
+            <a:schemeClr val="accent1"/>
+          </a:fillRef>
+          <a:effectRef idx="2">
+            <a:schemeClr val="accent1"/>
+          </a:effectRef>
+          <a:fontRef idx="minor">
+            <a:schemeClr val="lt1"/>
+          </a:fontRef>
+        </p:style>
+        <p:txBody>
+          <a:bodyPr rtlCol="0" anchor="ctr" wrap="square" lIns="45720" rIns="45720" tIns="18288" bIns="18288"/>
+          <a:lstStyle/>
+          <a:p>
+            <a:pPr algn="ctr">
+              <a:lnSpc>
+                <a:spcPct val="98000"/>
+              </a:lnSpc>
+            </a:pPr>
+            <a:r>
+              <a:rPr sz="800" b="1" i="0">
+                <a:solidFill>
+                  <a:srgbClr val="0E7C86"/>
+                </a:solidFill>
+                <a:latin typeface="Microsoft YaHei"/>
+                <a:ea typeface="Microsoft YaHei"/>
+              </a:rPr>
+              <a:t>ADR-0007</a:t>
+            </a:r>
+          </a:p>
+        </p:txBody>
+      </p:sp>
+      <p:sp>
+        <p:nvSpPr>
+          <p:cNvPr id="47" name="TextBox 46"/>
+          <p:cNvSpPr txBox="1"/>
+          <p:nvPr/>
+        </p:nvSpPr>
+        <p:spPr>
+          <a:xfrm>
+            <a:off x="1426464" y="5189220"/>
+            <a:ext cx="2212848" cy="274320"/>
+          </a:xfrm>
+          <a:prstGeom prst="rect">
+            <a:avLst/>
+          </a:prstGeom>
+          <a:noFill/>
+        </p:spPr>
+        <p:txBody>
+          <a:bodyPr wrap="square" anchor="ctr" lIns="45720" rIns="45720" tIns="18288" bIns="18288">
+            <a:spAutoFit/>
+          </a:bodyPr>
+          <a:lstStyle/>
+          <a:p>
+            <a:pPr algn="l">
+              <a:lnSpc>
+                <a:spcPct val="98000"/>
+              </a:lnSpc>
+            </a:pPr>
+            <a:r>
+              <a:rPr sz="850" b="1" i="0">
+                <a:solidFill>
+                  <a:srgbClr val="24324E"/>
+                </a:solidFill>
+                <a:latin typeface="Microsoft YaHei"/>
+                <a:ea typeface="Microsoft YaHei"/>
+              </a:rPr>
+              <a:t>排期改期边界与超期释放</a:t>
+            </a:r>
+          </a:p>
+        </p:txBody>
+      </p:sp>
+      <p:sp>
+        <p:nvSpPr>
+          <p:cNvPr id="48" name="TextBox 47"/>
+          <p:cNvSpPr txBox="1"/>
+          <p:nvPr/>
+        </p:nvSpPr>
+        <p:spPr>
+          <a:xfrm>
+            <a:off x="3657600" y="5189220"/>
+            <a:ext cx="2377440" cy="274320"/>
+          </a:xfrm>
+          <a:prstGeom prst="rect">
+            <a:avLst/>
+          </a:prstGeom>
+          <a:noFill/>
+        </p:spPr>
+        <p:txBody>
+          <a:bodyPr wrap="square" anchor="ctr" lIns="45720" rIns="45720" tIns="18288" bIns="18288">
+            <a:spAutoFit/>
+          </a:bodyPr>
+          <a:lstStyle/>
+          <a:p>
+            <a:pPr algn="l">
+              <a:lnSpc>
+                <a:spcPct val="98000"/>
+              </a:lnSpc>
+            </a:pPr>
+            <a:r>
+              <a:rPr sz="800" b="0" i="0">
+                <a:solidFill>
+                  <a:srgbClr val="4A556C"/>
+                </a:solidFill>
+                <a:latin typeface="Microsoft YaHei"/>
+                <a:ea typeface="Microsoft YaHei"/>
+              </a:rPr>
+              <a:t>同店改期允许 · 跨店强制阻断 · 当天禁退可改</a:t>
+            </a:r>
+          </a:p>
+        </p:txBody>
+      </p:sp>
+      <p:sp>
+        <p:nvSpPr>
+          <p:cNvPr id="49" name="TextBox 48"/>
+          <p:cNvSpPr txBox="1"/>
+          <p:nvPr/>
+        </p:nvSpPr>
+        <p:spPr>
+          <a:xfrm>
+            <a:off x="6144768" y="5189220"/>
+            <a:ext cx="411480" cy="274320"/>
+          </a:xfrm>
+          <a:prstGeom prst="rect">
+            <a:avLst/>
+          </a:prstGeom>
+          <a:noFill/>
+        </p:spPr>
+        <p:txBody>
+          <a:bodyPr wrap="square" anchor="ctr" lIns="45720" rIns="45720" tIns="18288" bIns="18288">
+            <a:spAutoFit/>
+          </a:bodyPr>
+          <a:lstStyle/>
+          <a:p>
+            <a:pPr algn="r">
+              <a:lnSpc>
+                <a:spcPct val="98000"/>
+              </a:lnSpc>
+            </a:pPr>
+            <a:r>
+              <a:rPr sz="850" b="1" i="0">
+                <a:solidFill>
+                  <a:srgbClr val="2E8B57"/>
+                </a:solidFill>
+                <a:latin typeface="Microsoft YaHei"/>
+                <a:ea typeface="Microsoft YaHei"/>
+              </a:rPr>
+              <a:t>4/4</a:t>
+            </a:r>
+          </a:p>
+        </p:txBody>
+      </p:sp>
+      <p:sp>
+        <p:nvSpPr>
+          <p:cNvPr id="50" name="Rounded Rectangle 49"/>
+          <p:cNvSpPr/>
+          <p:nvPr/>
+        </p:nvSpPr>
+        <p:spPr>
+          <a:xfrm>
+            <a:off x="640080" y="5509260"/>
+            <a:ext cx="713232" cy="256032"/>
+          </a:xfrm>
+          <a:prstGeom prst="roundRect">
+            <a:avLst>
+              <a:gd name="adj" fmla="val 50000"/>
+            </a:avLst>
+          </a:prstGeom>
+          <a:solidFill>
+            <a:srgbClr val="E1F1F2"/>
+          </a:solidFill>
+          <a:ln>
+            <a:noFill/>
+          </a:ln>
+          <a:effectLst/>
+        </p:spPr>
+        <p:style>
+          <a:lnRef idx="1">
+            <a:schemeClr val="accent1"/>
+          </a:lnRef>
+          <a:fillRef idx="3">
+            <a:schemeClr val="accent1"/>
+          </a:fillRef>
+          <a:effectRef idx="2">
+            <a:schemeClr val="accent1"/>
+          </a:effectRef>
+          <a:fontRef idx="minor">
+            <a:schemeClr val="lt1"/>
+          </a:fontRef>
+        </p:style>
+        <p:txBody>
+          <a:bodyPr rtlCol="0" anchor="ctr" wrap="square" lIns="45720" rIns="45720" tIns="18288" bIns="18288"/>
+          <a:lstStyle/>
+          <a:p>
+            <a:pPr algn="ctr">
+              <a:lnSpc>
+                <a:spcPct val="98000"/>
+              </a:lnSpc>
+            </a:pPr>
+            <a:r>
+              <a:rPr sz="800" b="1" i="0">
+                <a:solidFill>
+                  <a:srgbClr val="0E7C86"/>
+                </a:solidFill>
+                <a:latin typeface="Microsoft YaHei"/>
+                <a:ea typeface="Microsoft YaHei"/>
+              </a:rPr>
+              <a:t>ADR-0008</a:t>
+            </a:r>
+          </a:p>
+        </p:txBody>
+      </p:sp>
+      <p:sp>
+        <p:nvSpPr>
+          <p:cNvPr id="51" name="TextBox 50"/>
+          <p:cNvSpPr txBox="1"/>
+          <p:nvPr/>
+        </p:nvSpPr>
+        <p:spPr>
+          <a:xfrm>
+            <a:off x="1426464" y="5495544"/>
+            <a:ext cx="2212848" cy="274320"/>
+          </a:xfrm>
+          <a:prstGeom prst="rect">
+            <a:avLst/>
+          </a:prstGeom>
+          <a:noFill/>
+        </p:spPr>
+        <p:txBody>
+          <a:bodyPr wrap="square" anchor="ctr" lIns="45720" rIns="45720" tIns="18288" bIns="18288">
+            <a:spAutoFit/>
+          </a:bodyPr>
+          <a:lstStyle/>
+          <a:p>
+            <a:pPr algn="l">
+              <a:lnSpc>
+                <a:spcPct val="98000"/>
+              </a:lnSpc>
+            </a:pPr>
+            <a:r>
+              <a:rPr sz="850" b="1" i="0">
+                <a:solidFill>
+                  <a:srgbClr val="24324E"/>
+                </a:solidFill>
+                <a:latin typeface="Microsoft YaHei"/>
+                <a:ea typeface="Microsoft YaHei"/>
+              </a:rPr>
+              <a:t>合并履约与权益到期门禁</a:t>
+            </a:r>
+          </a:p>
+        </p:txBody>
+      </p:sp>
+      <p:sp>
+        <p:nvSpPr>
+          <p:cNvPr id="52" name="TextBox 51"/>
+          <p:cNvSpPr txBox="1"/>
+          <p:nvPr/>
+        </p:nvSpPr>
+        <p:spPr>
+          <a:xfrm>
+            <a:off x="3657600" y="5495544"/>
+            <a:ext cx="2377440" cy="274320"/>
+          </a:xfrm>
+          <a:prstGeom prst="rect">
+            <a:avLst/>
+          </a:prstGeom>
+          <a:noFill/>
+        </p:spPr>
+        <p:txBody>
+          <a:bodyPr wrap="square" anchor="ctr" lIns="45720" rIns="45720" tIns="18288" bIns="18288">
+            <a:spAutoFit/>
+          </a:bodyPr>
+          <a:lstStyle/>
+          <a:p>
+            <a:pPr algn="l">
+              <a:lnSpc>
+                <a:spcPct val="98000"/>
+              </a:lnSpc>
+            </a:pPr>
+            <a:r>
+              <a:rPr sz="800" b="0" i="0">
+                <a:solidFill>
+                  <a:srgbClr val="4A556C"/>
+                </a:solidFill>
+                <a:latin typeface="Microsoft YaHei"/>
+                <a:ea typeface="Microsoft YaHei"/>
+              </a:rPr>
+              <a:t>主+加项原子交付 · 过期禁止发起新预约</a:t>
+            </a:r>
+          </a:p>
+        </p:txBody>
+      </p:sp>
+      <p:sp>
+        <p:nvSpPr>
+          <p:cNvPr id="53" name="TextBox 52"/>
+          <p:cNvSpPr txBox="1"/>
+          <p:nvPr/>
+        </p:nvSpPr>
+        <p:spPr>
+          <a:xfrm>
+            <a:off x="6144768" y="5495544"/>
+            <a:ext cx="411480" cy="274320"/>
+          </a:xfrm>
+          <a:prstGeom prst="rect">
+            <a:avLst/>
+          </a:prstGeom>
+          <a:noFill/>
+        </p:spPr>
+        <p:txBody>
+          <a:bodyPr wrap="square" anchor="ctr" lIns="45720" rIns="45720" tIns="18288" bIns="18288">
+            <a:spAutoFit/>
+          </a:bodyPr>
+          <a:lstStyle/>
+          <a:p>
+            <a:pPr algn="r">
+              <a:lnSpc>
+                <a:spcPct val="98000"/>
+              </a:lnSpc>
+            </a:pPr>
+            <a:r>
+              <a:rPr sz="850" b="1" i="0">
+                <a:solidFill>
+                  <a:srgbClr val="2E8B57"/>
+                </a:solidFill>
+                <a:latin typeface="Microsoft YaHei"/>
+                <a:ea typeface="Microsoft YaHei"/>
+              </a:rPr>
+              <a:t>2/2</a:t>
+            </a:r>
+          </a:p>
+        </p:txBody>
+      </p:sp>
+      <p:sp>
+        <p:nvSpPr>
+          <p:cNvPr id="54" name="Rounded Rectangle 53"/>
+          <p:cNvSpPr/>
+          <p:nvPr/>
+        </p:nvSpPr>
+        <p:spPr>
+          <a:xfrm>
+            <a:off x="640080" y="5815584"/>
+            <a:ext cx="713232" cy="256032"/>
+          </a:xfrm>
+          <a:prstGeom prst="roundRect">
+            <a:avLst>
+              <a:gd name="adj" fmla="val 50000"/>
+            </a:avLst>
+          </a:prstGeom>
+          <a:solidFill>
+            <a:srgbClr val="E1F1F2"/>
+          </a:solidFill>
+          <a:ln>
+            <a:noFill/>
+          </a:ln>
+          <a:effectLst/>
+        </p:spPr>
+        <p:style>
+          <a:lnRef idx="1">
+            <a:schemeClr val="accent1"/>
+          </a:lnRef>
+          <a:fillRef idx="3">
+            <a:schemeClr val="accent1"/>
+          </a:fillRef>
+          <a:effectRef idx="2">
+            <a:schemeClr val="accent1"/>
+          </a:effectRef>
+          <a:fontRef idx="minor">
+            <a:schemeClr val="lt1"/>
+          </a:fontRef>
+        </p:style>
+        <p:txBody>
+          <a:bodyPr rtlCol="0" anchor="ctr" wrap="square" lIns="45720" rIns="45720" tIns="18288" bIns="18288"/>
+          <a:lstStyle/>
+          <a:p>
+            <a:pPr algn="ctr">
+              <a:lnSpc>
+                <a:spcPct val="98000"/>
+              </a:lnSpc>
+            </a:pPr>
+            <a:r>
+              <a:rPr sz="800" b="1" i="0">
+                <a:solidFill>
+                  <a:srgbClr val="0E7C86"/>
+                </a:solidFill>
+                <a:latin typeface="Microsoft YaHei"/>
+                <a:ea typeface="Microsoft YaHei"/>
+              </a:rPr>
+              <a:t>ADR-0009</a:t>
+            </a:r>
+          </a:p>
+        </p:txBody>
+      </p:sp>
+      <p:sp>
+        <p:nvSpPr>
+          <p:cNvPr id="55" name="TextBox 54"/>
+          <p:cNvSpPr txBox="1"/>
+          <p:nvPr/>
+        </p:nvSpPr>
+        <p:spPr>
+          <a:xfrm>
+            <a:off x="1426464" y="5801868"/>
+            <a:ext cx="2212848" cy="274320"/>
+          </a:xfrm>
+          <a:prstGeom prst="rect">
+            <a:avLst/>
+          </a:prstGeom>
+          <a:noFill/>
+        </p:spPr>
+        <p:txBody>
+          <a:bodyPr wrap="square" anchor="ctr" lIns="45720" rIns="45720" tIns="18288" bIns="18288">
+            <a:spAutoFit/>
+          </a:bodyPr>
+          <a:lstStyle/>
+          <a:p>
+            <a:pPr algn="l">
+              <a:lnSpc>
+                <a:spcPct val="98000"/>
+              </a:lnSpc>
+            </a:pPr>
+            <a:r>
+              <a:rPr sz="850" b="1" i="0">
+                <a:solidFill>
+                  <a:srgbClr val="24324E"/>
+                </a:solidFill>
+                <a:latin typeface="Microsoft YaHei"/>
+                <a:ea typeface="Microsoft YaHei"/>
+              </a:rPr>
+              <a:t>套餐层级与问卷推荐规约</a:t>
+            </a:r>
+          </a:p>
+        </p:txBody>
+      </p:sp>
+      <p:sp>
+        <p:nvSpPr>
+          <p:cNvPr id="56" name="TextBox 55"/>
+          <p:cNvSpPr txBox="1"/>
+          <p:nvPr/>
+        </p:nvSpPr>
+        <p:spPr>
+          <a:xfrm>
+            <a:off x="3657600" y="5801868"/>
+            <a:ext cx="2377440" cy="274320"/>
+          </a:xfrm>
+          <a:prstGeom prst="rect">
+            <a:avLst/>
+          </a:prstGeom>
+          <a:noFill/>
+        </p:spPr>
+        <p:txBody>
+          <a:bodyPr wrap="square" anchor="ctr" lIns="45720" rIns="45720" tIns="18288" bIns="18288">
+            <a:spAutoFit/>
+          </a:bodyPr>
+          <a:lstStyle/>
+          <a:p>
+            <a:pPr algn="l">
+              <a:lnSpc>
+                <a:spcPct val="98000"/>
+              </a:lnSpc>
+            </a:pPr>
+            <a:r>
+              <a:rPr sz="800" b="0" i="0">
+                <a:solidFill>
+                  <a:srgbClr val="4A556C"/>
+                </a:solidFill>
+                <a:latin typeface="Microsoft YaHei"/>
+                <a:ea typeface="Microsoft YaHei"/>
+              </a:rPr>
+              <a:t>单选互斥多选拦截 · 适检门禁 · 家属包不统付</a:t>
+            </a:r>
+          </a:p>
+        </p:txBody>
+      </p:sp>
+      <p:sp>
+        <p:nvSpPr>
+          <p:cNvPr id="57" name="TextBox 56"/>
+          <p:cNvSpPr txBox="1"/>
+          <p:nvPr/>
+        </p:nvSpPr>
+        <p:spPr>
+          <a:xfrm>
+            <a:off x="6144768" y="5801868"/>
+            <a:ext cx="411480" cy="274320"/>
+          </a:xfrm>
+          <a:prstGeom prst="rect">
+            <a:avLst/>
+          </a:prstGeom>
+          <a:noFill/>
+        </p:spPr>
+        <p:txBody>
+          <a:bodyPr wrap="square" anchor="ctr" lIns="45720" rIns="45720" tIns="18288" bIns="18288">
+            <a:spAutoFit/>
+          </a:bodyPr>
+          <a:lstStyle/>
+          <a:p>
+            <a:pPr algn="r">
+              <a:lnSpc>
+                <a:spcPct val="98000"/>
+              </a:lnSpc>
+            </a:pPr>
+            <a:r>
+              <a:rPr sz="850" b="1" i="0">
+                <a:solidFill>
+                  <a:srgbClr val="2E8B57"/>
+                </a:solidFill>
+                <a:latin typeface="Microsoft YaHei"/>
+                <a:ea typeface="Microsoft YaHei"/>
+              </a:rPr>
+              <a:t>4/4</a:t>
+            </a:r>
+          </a:p>
+        </p:txBody>
+      </p:sp>
+      <p:sp>
+        <p:nvSpPr>
+          <p:cNvPr id="58" name="Rounded Rectangle 57"/>
+          <p:cNvSpPr/>
+          <p:nvPr/>
+        </p:nvSpPr>
+        <p:spPr>
+          <a:xfrm>
+            <a:off x="6812280" y="2962656"/>
+            <a:ext cx="4873752" cy="969264"/>
+          </a:xfrm>
+          <a:prstGeom prst="roundRect">
+            <a:avLst>
+              <a:gd name="adj" fmla="val 7000"/>
+            </a:avLst>
+          </a:prstGeom>
+          <a:solidFill>
+            <a:srgbClr val="FFFFFF"/>
+          </a:solidFill>
+          <a:ln w="13970">
+            <a:solidFill>
+              <a:srgbClr val="0E7C86"/>
+            </a:solidFill>
+          </a:ln>
+          <a:effectLst/>
+        </p:spPr>
+        <p:style>
+          <a:lnRef idx="1">
+            <a:schemeClr val="accent1"/>
+          </a:lnRef>
+          <a:fillRef idx="3">
+            <a:schemeClr val="accent1"/>
+          </a:fillRef>
+          <a:effectRef idx="2">
+            <a:schemeClr val="accent1"/>
+          </a:effectRef>
+          <a:fontRef idx="minor">
+            <a:schemeClr val="lt1"/>
+          </a:fontRef>
+        </p:style>
+        <p:txBody>
+          <a:bodyPr rtlCol="0" anchor="ctr" wrap="square" lIns="45720" rIns="45720" tIns="18288" bIns="18288"/>
+          <a:lstStyle/>
+          <a:p>
+            <a:pPr algn="ctr">
+              <a:lnSpc>
+                <a:spcPct val="98000"/>
+              </a:lnSpc>
+            </a:pPr>
+            <a:r>
+              <a:rPr sz="1000" b="0" i="0">
+                <a:solidFill>
+                  <a:srgbClr val="24324E"/>
+                </a:solidFill>
+                <a:latin typeface="Microsoft YaHei"/>
+                <a:ea typeface="Microsoft YaHei"/>
+              </a:rPr>
+              <a:t/>
+            </a:r>
+          </a:p>
+        </p:txBody>
+      </p:sp>
+      <p:sp>
+        <p:nvSpPr>
+          <p:cNvPr id="59" name="TextBox 58"/>
+          <p:cNvSpPr txBox="1"/>
+          <p:nvPr/>
+        </p:nvSpPr>
+        <p:spPr>
+          <a:xfrm>
+            <a:off x="6976872" y="3072384"/>
+            <a:ext cx="4599432" cy="256032"/>
+          </a:xfrm>
+          <a:prstGeom prst="rect">
+            <a:avLst/>
+          </a:prstGeom>
+          <a:noFill/>
+        </p:spPr>
+        <p:txBody>
+          <a:bodyPr wrap="square" anchor="ctr" lIns="45720" rIns="45720" tIns="18288" bIns="18288">
+            <a:spAutoFit/>
+          </a:bodyPr>
+          <a:lstStyle/>
+          <a:p>
+            <a:pPr algn="l">
+              <a:lnSpc>
+                <a:spcPct val="98000"/>
+              </a:lnSpc>
+            </a:pPr>
+            <a:r>
+              <a:rPr sz="1050" b="1" i="0">
+                <a:solidFill>
+                  <a:srgbClr val="0E7C86"/>
+                </a:solidFill>
+                <a:latin typeface="Microsoft YaHei"/>
+                <a:ea typeface="Microsoft YaHei"/>
+              </a:rPr>
+              <a:t>① 域边界测试 · 正例允许 / 反例拦截</a:t>
+            </a:r>
+          </a:p>
+        </p:txBody>
+      </p:sp>
+      <p:sp>
+        <p:nvSpPr>
+          <p:cNvPr id="60" name="TextBox 59"/>
+          <p:cNvSpPr txBox="1"/>
+          <p:nvPr/>
+        </p:nvSpPr>
+        <p:spPr>
+          <a:xfrm>
+            <a:off x="6976872" y="3346704"/>
+            <a:ext cx="4544568" cy="548640"/>
+          </a:xfrm>
+          <a:prstGeom prst="rect">
+            <a:avLst/>
+          </a:prstGeom>
+          <a:noFill/>
+        </p:spPr>
+        <p:txBody>
+          <a:bodyPr wrap="square" anchor="ctr" lIns="45720" rIns="45720" tIns="18288" bIns="18288">
+            <a:spAutoFit/>
+          </a:bodyPr>
+          <a:lstStyle/>
+          <a:p>
+            <a:pPr algn="l">
+              <a:lnSpc>
+                <a:spcPct val="98000"/>
+              </a:lnSpc>
+            </a:pPr>
+            <a:r>
+              <a:rPr sz="850" b="0" i="0">
+                <a:solidFill>
+                  <a:srgbClr val="4A556C"/>
+                </a:solidFill>
+                <a:latin typeface="Microsoft YaHei"/>
+                <a:ea typeface="Microsoft YaHei"/>
+              </a:rPr>
+              <a:t>每条决策同时验证「应该发生」与「必须被拒绝」：跨店改期阻断、多选主干套餐拦截、</a:t>
+            </a:r>
+          </a:p>
+          <a:p>
+            <a:pPr algn="l">
+              <a:lnSpc>
+                <a:spcPct val="98000"/>
+              </a:lnSpc>
+            </a:pPr>
+            <a:r>
+              <a:rPr sz="850" b="0" i="0">
+                <a:solidFill>
+                  <a:srgbClr val="4A556C"/>
+                </a:solidFill>
+                <a:latin typeface="Microsoft YaHei"/>
+                <a:ea typeface="Microsoft YaHei"/>
+              </a:rPr>
+              <a:t>适检门禁硬校验、资金未确认提前退积分判为严重缺陷。</a:t>
+            </a:r>
+          </a:p>
+        </p:txBody>
+      </p:sp>
+      <p:sp>
+        <p:nvSpPr>
+          <p:cNvPr id="61" name="Rounded Rectangle 60"/>
+          <p:cNvSpPr/>
+          <p:nvPr/>
+        </p:nvSpPr>
+        <p:spPr>
+          <a:xfrm>
+            <a:off x="6812280" y="4059936"/>
+            <a:ext cx="4873752" cy="969264"/>
+          </a:xfrm>
+          <a:prstGeom prst="roundRect">
+            <a:avLst>
+              <a:gd name="adj" fmla="val 7000"/>
+            </a:avLst>
+          </a:prstGeom>
+          <a:solidFill>
+            <a:srgbClr val="FFFFFF"/>
+          </a:solidFill>
+          <a:ln w="13970">
+            <a:solidFill>
+              <a:srgbClr val="2F6DB3"/>
+            </a:solidFill>
+          </a:ln>
+          <a:effectLst/>
+        </p:spPr>
+        <p:style>
+          <a:lnRef idx="1">
+            <a:schemeClr val="accent1"/>
+          </a:lnRef>
+          <a:fillRef idx="3">
+            <a:schemeClr val="accent1"/>
+          </a:fillRef>
+          <a:effectRef idx="2">
+            <a:schemeClr val="accent1"/>
+          </a:effectRef>
+          <a:fontRef idx="minor">
+            <a:schemeClr val="lt1"/>
+          </a:fontRef>
+        </p:style>
+        <p:txBody>
+          <a:bodyPr rtlCol="0" anchor="ctr" wrap="square" lIns="45720" rIns="45720" tIns="18288" bIns="18288"/>
+          <a:lstStyle/>
+          <a:p>
+            <a:pPr algn="ctr">
+              <a:lnSpc>
+                <a:spcPct val="98000"/>
+              </a:lnSpc>
+            </a:pPr>
+            <a:r>
+              <a:rPr sz="1000" b="0" i="0">
+                <a:solidFill>
+                  <a:srgbClr val="24324E"/>
+                </a:solidFill>
+                <a:latin typeface="Microsoft YaHei"/>
+                <a:ea typeface="Microsoft YaHei"/>
+              </a:rPr>
+              <a:t/>
+            </a:r>
+          </a:p>
+        </p:txBody>
+      </p:sp>
+      <p:sp>
+        <p:nvSpPr>
+          <p:cNvPr id="62" name="TextBox 61"/>
+          <p:cNvSpPr txBox="1"/>
+          <p:nvPr/>
+        </p:nvSpPr>
+        <p:spPr>
+          <a:xfrm>
+            <a:off x="6976872" y="4169663"/>
+            <a:ext cx="4599432" cy="256032"/>
+          </a:xfrm>
+          <a:prstGeom prst="rect">
+            <a:avLst/>
+          </a:prstGeom>
+          <a:noFill/>
+        </p:spPr>
+        <p:txBody>
+          <a:bodyPr wrap="square" anchor="ctr" lIns="45720" rIns="45720" tIns="18288" bIns="18288">
+            <a:spAutoFit/>
+          </a:bodyPr>
+          <a:lstStyle/>
+          <a:p>
+            <a:pPr algn="l">
+              <a:lnSpc>
+                <a:spcPct val="98000"/>
+              </a:lnSpc>
+            </a:pPr>
+            <a:r>
+              <a:rPr sz="1050" b="1" i="0">
+                <a:solidFill>
+                  <a:srgbClr val="2F6DB3"/>
+                </a:solidFill>
+                <a:latin typeface="Microsoft YaHei"/>
+                <a:ea typeface="Microsoft YaHei"/>
+              </a:rPr>
+              <a:t>② 回归测试 · 决策规则即护栏</a:t>
+            </a:r>
+          </a:p>
+        </p:txBody>
+      </p:sp>
+      <p:sp>
+        <p:nvSpPr>
+          <p:cNvPr id="63" name="TextBox 62"/>
+          <p:cNvSpPr txBox="1"/>
+          <p:nvPr/>
+        </p:nvSpPr>
+        <p:spPr>
+          <a:xfrm>
+            <a:off x="6976872" y="4443984"/>
+            <a:ext cx="4544568" cy="548640"/>
+          </a:xfrm>
+          <a:prstGeom prst="rect">
+            <a:avLst/>
+          </a:prstGeom>
+          <a:noFill/>
+        </p:spPr>
+        <p:txBody>
+          <a:bodyPr wrap="square" anchor="ctr" lIns="45720" rIns="45720" tIns="18288" bIns="18288">
+            <a:spAutoFit/>
+          </a:bodyPr>
+          <a:lstStyle/>
+          <a:p>
+            <a:pPr algn="l">
+              <a:lnSpc>
+                <a:spcPct val="98000"/>
+              </a:lnSpc>
+            </a:pPr>
+            <a:r>
+              <a:rPr sz="850" b="0" i="0">
+                <a:solidFill>
+                  <a:srgbClr val="4A556C"/>
+                </a:solidFill>
+                <a:latin typeface="Microsoft YaHei"/>
+                <a:ea typeface="Microsoft YaHei"/>
+              </a:rPr>
+              <a:t>规则即用例：任何需求变更 / 重构后一键重跑全量用例，防止新代码破坏既有架构约束，</a:t>
+            </a:r>
+          </a:p>
+          <a:p>
+            <a:pPr algn="l">
+              <a:lnSpc>
+                <a:spcPct val="98000"/>
+              </a:lnSpc>
+            </a:pPr>
+            <a:r>
+              <a:rPr sz="850" b="0" i="0">
+                <a:solidFill>
+                  <a:srgbClr val="4A556C"/>
+                </a:solidFill>
+                <a:latin typeface="Microsoft YaHei"/>
+                <a:ea typeface="Microsoft YaHei"/>
+              </a:rPr>
+              <a:t>替代人工全链路巡检与口头约定。</a:t>
+            </a:r>
+          </a:p>
+        </p:txBody>
+      </p:sp>
+      <p:sp>
+        <p:nvSpPr>
+          <p:cNvPr id="64" name="Rounded Rectangle 63"/>
+          <p:cNvSpPr/>
+          <p:nvPr/>
+        </p:nvSpPr>
+        <p:spPr>
+          <a:xfrm>
+            <a:off x="6812280" y="5157216"/>
+            <a:ext cx="4873752" cy="969264"/>
+          </a:xfrm>
+          <a:prstGeom prst="roundRect">
+            <a:avLst>
+              <a:gd name="adj" fmla="val 7000"/>
+            </a:avLst>
+          </a:prstGeom>
+          <a:solidFill>
+            <a:srgbClr val="FFFFFF"/>
+          </a:solidFill>
+          <a:ln w="13970">
+            <a:solidFill>
+              <a:srgbClr val="2E8B57"/>
+            </a:solidFill>
+          </a:ln>
+          <a:effectLst/>
+        </p:spPr>
+        <p:style>
+          <a:lnRef idx="1">
+            <a:schemeClr val="accent1"/>
+          </a:lnRef>
+          <a:fillRef idx="3">
+            <a:schemeClr val="accent1"/>
+          </a:fillRef>
+          <a:effectRef idx="2">
+            <a:schemeClr val="accent1"/>
+          </a:effectRef>
+          <a:fontRef idx="minor">
+            <a:schemeClr val="lt1"/>
+          </a:fontRef>
+        </p:style>
+        <p:txBody>
+          <a:bodyPr rtlCol="0" anchor="ctr" wrap="square" lIns="45720" rIns="45720" tIns="18288" bIns="18288"/>
+          <a:lstStyle/>
+          <a:p>
+            <a:pPr algn="ctr">
+              <a:lnSpc>
+                <a:spcPct val="98000"/>
+              </a:lnSpc>
+            </a:pPr>
+            <a:r>
+              <a:rPr sz="1000" b="0" i="0">
+                <a:solidFill>
+                  <a:srgbClr val="24324E"/>
+                </a:solidFill>
+                <a:latin typeface="Microsoft YaHei"/>
+                <a:ea typeface="Microsoft YaHei"/>
+              </a:rPr>
+              <a:t/>
+            </a:r>
+          </a:p>
+        </p:txBody>
+      </p:sp>
+      <p:sp>
+        <p:nvSpPr>
+          <p:cNvPr id="65" name="TextBox 64"/>
+          <p:cNvSpPr txBox="1"/>
+          <p:nvPr/>
+        </p:nvSpPr>
+        <p:spPr>
+          <a:xfrm>
+            <a:off x="6976872" y="5266944"/>
+            <a:ext cx="4599432" cy="256032"/>
+          </a:xfrm>
+          <a:prstGeom prst="rect">
+            <a:avLst/>
+          </a:prstGeom>
+          <a:noFill/>
+        </p:spPr>
+        <p:txBody>
+          <a:bodyPr wrap="square" anchor="ctr" lIns="45720" rIns="45720" tIns="18288" bIns="18288">
+            <a:spAutoFit/>
+          </a:bodyPr>
+          <a:lstStyle/>
+          <a:p>
+            <a:pPr algn="l">
+              <a:lnSpc>
+                <a:spcPct val="98000"/>
+              </a:lnSpc>
+            </a:pPr>
+            <a:r>
+              <a:rPr sz="1050" b="1" i="0">
+                <a:solidFill>
+                  <a:srgbClr val="2E8B57"/>
+                </a:solidFill>
+                <a:latin typeface="Microsoft YaHei"/>
+                <a:ea typeface="Microsoft YaHei"/>
+              </a:rPr>
+              <a:t>③ 减少人工 · 用例即活文档</a:t>
+            </a:r>
+          </a:p>
+        </p:txBody>
+      </p:sp>
+      <p:sp>
+        <p:nvSpPr>
+          <p:cNvPr id="66" name="TextBox 65"/>
+          <p:cNvSpPr txBox="1"/>
+          <p:nvPr/>
+        </p:nvSpPr>
+        <p:spPr>
+          <a:xfrm>
+            <a:off x="6976872" y="5541264"/>
+            <a:ext cx="4544568" cy="548640"/>
+          </a:xfrm>
+          <a:prstGeom prst="rect">
+            <a:avLst/>
+          </a:prstGeom>
+          <a:noFill/>
+        </p:spPr>
+        <p:txBody>
+          <a:bodyPr wrap="square" anchor="ctr" lIns="45720" rIns="45720" tIns="18288" bIns="18288">
+            <a:spAutoFit/>
+          </a:bodyPr>
+          <a:lstStyle/>
+          <a:p>
+            <a:pPr algn="l">
+              <a:lnSpc>
+                <a:spcPct val="98000"/>
+              </a:lnSpc>
+            </a:pPr>
+            <a:r>
+              <a:rPr sz="850" b="0" i="0">
+                <a:solidFill>
+                  <a:srgbClr val="4A556C"/>
+                </a:solidFill>
+                <a:latin typeface="Microsoft YaHei"/>
+                <a:ea typeface="Microsoft YaHei"/>
+              </a:rPr>
+              <a:t>测试断言即规格口径：评审聚焦新决策与例外场景，规则分歧以断言为准；</a:t>
+            </a:r>
+          </a:p>
+          <a:p>
+            <a:pPr algn="l">
+              <a:lnSpc>
+                <a:spcPct val="98000"/>
+              </a:lnSpc>
+            </a:pPr>
+            <a:r>
+              <a:rPr sz="850" b="0" i="0">
+                <a:solidFill>
+                  <a:srgbClr val="4A556C"/>
+                </a:solidFill>
+                <a:latin typeface="Microsoft YaHei"/>
+                <a:ea typeface="Microsoft YaHei"/>
+              </a:rPr>
+              <a:t>0010/0011（报告解读 · 商城卡券）可按同一模式持续扩展。</a:t>
+            </a:r>
+          </a:p>
+        </p:txBody>
+      </p:sp>
+      <p:sp>
+        <p:nvSpPr>
+          <p:cNvPr id="67" name="Rounded Rectangle 66"/>
+          <p:cNvSpPr/>
+          <p:nvPr/>
+        </p:nvSpPr>
+        <p:spPr>
+          <a:xfrm>
+            <a:off x="502920" y="6345936"/>
+            <a:ext cx="7498079" cy="384048"/>
+          </a:xfrm>
+          <a:prstGeom prst="roundRect">
+            <a:avLst>
+              <a:gd name="adj" fmla="val 16000"/>
+            </a:avLst>
+          </a:prstGeom>
+          <a:solidFill>
+            <a:srgbClr val="1B2A4A"/>
+          </a:solidFill>
+          <a:ln>
+            <a:noFill/>
+          </a:ln>
+          <a:effectLst/>
+        </p:spPr>
+        <p:style>
+          <a:lnRef idx="1">
+            <a:schemeClr val="accent1"/>
+          </a:lnRef>
+          <a:fillRef idx="3">
+            <a:schemeClr val="accent1"/>
+          </a:fillRef>
+          <a:effectRef idx="2">
+            <a:schemeClr val="accent1"/>
+          </a:effectRef>
+          <a:fontRef idx="minor">
+            <a:schemeClr val="lt1"/>
+          </a:fontRef>
+        </p:style>
+        <p:txBody>
+          <a:bodyPr rtlCol="0" anchor="ctr" wrap="square" lIns="45720" rIns="45720" tIns="18288" bIns="18288"/>
+          <a:lstStyle/>
+          <a:p>
+            <a:pPr algn="ctr">
+              <a:lnSpc>
+                <a:spcPct val="98000"/>
+              </a:lnSpc>
+            </a:pPr>
+            <a:r>
+              <a:rPr sz="1050" b="1" i="0">
+                <a:solidFill>
+                  <a:srgbClr val="9FE8B0"/>
+                </a:solidFill>
+                <a:latin typeface="Microsoft YaHei"/>
+                <a:ea typeface="Microsoft YaHei"/>
+              </a:rPr>
+              <a:t>运行命令：  node --test tests/adr_rules.test.mjs</a:t>
+            </a:r>
+          </a:p>
+        </p:txBody>
+      </p:sp>
+      <p:sp>
+        <p:nvSpPr>
+          <p:cNvPr id="68" name="Rounded Rectangle 67"/>
+          <p:cNvSpPr/>
+          <p:nvPr/>
+        </p:nvSpPr>
+        <p:spPr>
+          <a:xfrm>
+            <a:off x="8138160" y="6345936"/>
+            <a:ext cx="3547872" cy="384048"/>
+          </a:xfrm>
+          <a:prstGeom prst="roundRect">
+            <a:avLst>
+              <a:gd name="adj" fmla="val 16000"/>
+            </a:avLst>
+          </a:prstGeom>
+          <a:solidFill>
+            <a:srgbClr val="E6F4EB"/>
+          </a:solidFill>
+          <a:ln w="12700">
+            <a:solidFill>
+              <a:srgbClr val="2E8B57"/>
+            </a:solidFill>
+          </a:ln>
+          <a:effectLst/>
+        </p:spPr>
+        <p:style>
+          <a:lnRef idx="1">
+            <a:schemeClr val="accent1"/>
+          </a:lnRef>
+          <a:fillRef idx="3">
+            <a:schemeClr val="accent1"/>
+          </a:fillRef>
+          <a:effectRef idx="2">
+            <a:schemeClr val="accent1"/>
+          </a:effectRef>
+          <a:fontRef idx="minor">
+            <a:schemeClr val="lt1"/>
+          </a:fontRef>
+        </p:style>
+        <p:txBody>
+          <a:bodyPr rtlCol="0" anchor="ctr" wrap="square" lIns="45720" rIns="45720" tIns="18288" bIns="18288"/>
+          <a:lstStyle/>
+          <a:p>
+            <a:pPr algn="ctr">
+              <a:lnSpc>
+                <a:spcPct val="98000"/>
+              </a:lnSpc>
+            </a:pPr>
+            <a:r>
+              <a:rPr sz="1000" b="1" i="0">
+                <a:solidFill>
+                  <a:srgbClr val="1D6B3C"/>
+                </a:solidFill>
+                <a:latin typeface="Microsoft YaHei"/>
+                <a:ea typeface="Microsoft YaHei"/>
+              </a:rPr>
+              <a:t>24/24 Passed · 全域边界校验通过</a:t>
+            </a:r>
+          </a:p>
+        </p:txBody>
+      </p:sp>
+      <p:sp>
+        <p:nvSpPr>
+          <p:cNvPr id="69" name="TextBox 68"/>
+          <p:cNvSpPr txBox="1"/>
+          <p:nvPr/>
+        </p:nvSpPr>
+        <p:spPr>
+          <a:xfrm>
+            <a:off x="11292840" y="6473952"/>
+            <a:ext cx="777240" cy="274320"/>
+          </a:xfrm>
+          <a:prstGeom prst="rect">
+            <a:avLst/>
+          </a:prstGeom>
+          <a:noFill/>
+        </p:spPr>
+        <p:txBody>
+          <a:bodyPr wrap="square" anchor="ctr" lIns="45720" rIns="45720" tIns="18288" bIns="18288">
+            <a:spAutoFit/>
+          </a:bodyPr>
+          <a:lstStyle/>
+          <a:p>
+            <a:pPr algn="r">
+              <a:lnSpc>
+                <a:spcPct val="98000"/>
+              </a:lnSpc>
+            </a:pPr>
+            <a:r>
+              <a:rPr sz="900" b="0" i="0">
+                <a:solidFill>
+                  <a:srgbClr val="6B778C"/>
+                </a:solidFill>
+                <a:latin typeface="Microsoft YaHei"/>
+                <a:ea typeface="Microsoft YaHei"/>
+              </a:rPr>
+              <a:t>26</a:t>
             </a:r>
           </a:p>
         </p:txBody>
